--- a/course-package/slides/00-course-orientation.pptx
+++ b/course-package/slides/00-course-orientation.pptx
@@ -15,6 +15,8 @@
     <p:sldId id="263" r:id="rId15"/>
     <p:sldId id="264" r:id="rId16"/>
     <p:sldId id="265" r:id="rId17"/>
+    <p:sldId id="266" r:id="rId18"/>
+    <p:sldId id="267" r:id="rId19"/>
   </p:sldIdLst>
   <p:sldSz cx="12191695" cy="6858000" type="screen4x3"/>
   <p:notesSz cx="6858000" cy="9144000"/>
@@ -511,7 +513,7 @@
           <a:lstStyle/>
           <a:p>
             <a:r>
-              <a:t>開場白：先不要急著裝東西。花五分鐘講清楚這門課怎麼上，後面兩天會省下很多焦慮。</a:t>
+              <a:t>開場白：先不要急著裝東西。先看完整課程路線與共同情境，再花幾分鐘講清楚這門課怎麼上，後面幾天會省下很多焦慮。</a:t>
             </a:r>
           </a:p>
         </p:txBody>
@@ -581,6 +583,146 @@
           <a:lstStyle/>
           <a:p>
             <a:r>
+              <a:t>這頁是給焦慮型學員的解藥。『無限次、沒有期限』要講清楚。三遍的用法建議照著念，這是很具體的行動建議。</a:t>
+            </a:r>
+          </a:p>
+        </p:txBody>
+      </p:sp>
+      <p:sp>
+        <p:nvSpPr>
+          <p:cNvPr id="4" name="Slide Number Placeholder 3"/>
+          <p:cNvSpPr>
+            <a:spLocks noGrp="1"/>
+          </p:cNvSpPr>
+          <p:nvPr>
+            <p:ph type="sldNum" idx="5" sz="quarter"/>
+          </p:nvPr>
+        </p:nvSpPr>
+        <p:spPr/>
+      </p:sp>
+    </p:spTree>
+  </p:cSld>
+  <p:clrMapOvr>
+    <a:masterClrMapping/>
+  </p:clrMapOvr>
+</p:notes>
+</file>
+
+<file path=ppt/notesSlides/notesSlide11.xml><?xml version="1.0" encoding="utf-8"?>
+<p:notes xmlns:a="http://schemas.openxmlformats.org/drawingml/2006/main" xmlns:p="http://schemas.openxmlformats.org/presentationml/2006/main" xmlns:r="http://schemas.openxmlformats.org/officeDocument/2006/relationships">
+  <p:cSld>
+    <p:spTree>
+      <p:nvGrpSpPr>
+        <p:cNvPr id="1" name=""/>
+        <p:cNvGrpSpPr/>
+        <p:nvPr/>
+      </p:nvGrpSpPr>
+      <p:grpSpPr>
+        <a:xfrm>
+          <a:off x="0" y="0"/>
+          <a:ext cx="0" cy="0"/>
+          <a:chOff x="0" y="0"/>
+          <a:chExt cx="0" cy="0"/>
+        </a:xfrm>
+      </p:grpSpPr>
+      <p:sp>
+        <p:nvSpPr>
+          <p:cNvPr id="2" name="Slide Image Placeholder 1"/>
+          <p:cNvSpPr>
+            <a:spLocks noGrp="1"/>
+          </p:cNvSpPr>
+          <p:nvPr>
+            <p:ph type="sldImg" idx="2"/>
+          </p:nvPr>
+        </p:nvSpPr>
+        <p:spPr/>
+      </p:sp>
+      <p:sp>
+        <p:nvSpPr>
+          <p:cNvPr id="3" name="Notes Placeholder 2"/>
+          <p:cNvSpPr>
+            <a:spLocks noGrp="1"/>
+          </p:cNvSpPr>
+          <p:nvPr>
+            <p:ph type="body" idx="3" sz="quarter"/>
+          </p:nvPr>
+        </p:nvSpPr>
+        <p:spPr/>
+        <p:txBody>
+          <a:bodyPr/>
+          <a:lstStyle/>
+          <a:p>
+            <a:r>
+              <a:t>這頁要講得輕鬆一點，帶點笑意。目的是把『跟丟＝我不行』這個聯想拆掉。</a:t>
+            </a:r>
+          </a:p>
+        </p:txBody>
+      </p:sp>
+      <p:sp>
+        <p:nvSpPr>
+          <p:cNvPr id="4" name="Slide Number Placeholder 3"/>
+          <p:cNvSpPr>
+            <a:spLocks noGrp="1"/>
+          </p:cNvSpPr>
+          <p:nvPr>
+            <p:ph type="sldNum" idx="5" sz="quarter"/>
+          </p:nvPr>
+        </p:nvSpPr>
+        <p:spPr/>
+      </p:sp>
+    </p:spTree>
+  </p:cSld>
+  <p:clrMapOvr>
+    <a:masterClrMapping/>
+  </p:clrMapOvr>
+</p:notes>
+</file>
+
+<file path=ppt/notesSlides/notesSlide12.xml><?xml version="1.0" encoding="utf-8"?>
+<p:notes xmlns:a="http://schemas.openxmlformats.org/drawingml/2006/main" xmlns:p="http://schemas.openxmlformats.org/presentationml/2006/main" xmlns:r="http://schemas.openxmlformats.org/officeDocument/2006/relationships">
+  <p:cSld>
+    <p:spTree>
+      <p:nvGrpSpPr>
+        <p:cNvPr id="1" name=""/>
+        <p:cNvGrpSpPr/>
+        <p:nvPr/>
+      </p:nvGrpSpPr>
+      <p:grpSpPr>
+        <a:xfrm>
+          <a:off x="0" y="0"/>
+          <a:ext cx="0" cy="0"/>
+          <a:chOff x="0" y="0"/>
+          <a:chExt cx="0" cy="0"/>
+        </a:xfrm>
+      </p:grpSpPr>
+      <p:sp>
+        <p:nvSpPr>
+          <p:cNvPr id="2" name="Slide Image Placeholder 1"/>
+          <p:cNvSpPr>
+            <a:spLocks noGrp="1"/>
+          </p:cNvSpPr>
+          <p:nvPr>
+            <p:ph type="sldImg" idx="2"/>
+          </p:nvPr>
+        </p:nvSpPr>
+        <p:spPr/>
+      </p:sp>
+      <p:sp>
+        <p:nvSpPr>
+          <p:cNvPr id="3" name="Notes Placeholder 2"/>
+          <p:cNvSpPr>
+            <a:spLocks noGrp="1"/>
+          </p:cNvSpPr>
+          <p:nvPr>
+            <p:ph type="body" idx="3" sz="quarter"/>
+          </p:nvPr>
+        </p:nvSpPr>
+        <p:spPr/>
+        <p:txBody>
+          <a:bodyPr/>
+          <a:lstStyle/>
+          <a:p>
+            <a:r>
               <a:t>收尾要快，直接把動能帶進第一節。最後一句是鉤子，講完就翻頁。</a:t>
             </a:r>
           </a:p>
@@ -651,7 +793,7 @@
           <a:lstStyle/>
           <a:p>
             <a:r>
-              <a:t>這兩種狀況我看過太多次。重點不是罵學員，是要讓他知道『這是課程設計要解決的問題』，不是他的問題。講的時候放慢，讓他對號入座。</a:t>
+              <a:t>在任何環境安裝前，先讓學員知道這 32 小時最後要交付什麼。不要逐項念技術名詞，請用『同一套 CRM 一路長出來』串起前後半段。</a:t>
             </a:r>
           </a:p>
         </p:txBody>
@@ -721,7 +863,7 @@
           <a:lstStyle/>
           <a:p>
             <a:r>
-              <a:t>這頁是整場開場的骨架。強調『兩種責任』而不是『兩種資源』——責任分清楚，學員才知道自己該把注意力放哪。</a:t>
+              <a:t>這不是額外故事，而是後續 API、畫面與 AI 回答的共同驗收基準。指著三種客戶狀態說明：看到數字要回到程式資料，需要摘要與建議才交給 AI。</a:t>
             </a:r>
           </a:p>
         </p:txBody>
@@ -791,7 +933,7 @@
           <a:lstStyle/>
           <a:p>
             <a:r>
-              <a:t>這是整場最重要的一句話，也是唯一希望學員記住的口訣。講完停兩秒，不要急著翻頁。</a:t>
+              <a:t>這兩種狀況我看過太多次。重點不是罵學員，是要讓他知道『這是課程設計要解決的問題』，不是他的問題。講的時候放慢，讓他對號入座。</a:t>
             </a:r>
           </a:p>
         </p:txBody>
@@ -861,7 +1003,7 @@
           <a:lstStyle/>
           <a:p>
             <a:r>
-              <a:t>這頁是整場唯一的『行為指令』。三樣東西要一項一項講，講完停一下讓他真的把筆放下。</a:t>
+              <a:t>這頁是整場開場的骨架。強調『兩種責任』而不是『兩種資源』——責任分清楚，學員才知道自己該把注意力放哪。</a:t>
             </a:r>
           </a:p>
         </p:txBody>
@@ -931,7 +1073,7 @@
           <a:lstStyle/>
           <a:p>
             <a:r>
-              <a:t>快速帶過即可，不要逐項念完。重點是讓學員知道『每一節都有對應頁面』，細節他自己會逛。分類提示詞那一項值得多講一句。</a:t>
+              <a:t>這是整場最重要的一句話，也是唯一希望學員記住的口訣。講完停兩秒，不要急著翻頁。</a:t>
             </a:r>
           </a:p>
         </p:txBody>
@@ -1001,7 +1143,7 @@
           <a:lstStyle/>
           <a:p>
             <a:r>
-              <a:t>七份教材不用逐一念，指著螢幕帶過主題範圍就好。強調『這些是可下載的檔案，不是只能線上看』。網站上另有一份 Embabel 選修附錄，不列在這裡，不用主動提。</a:t>
+              <a:t>這頁是整場唯一的『行為指令』。三樣東西要一項一項講，講完停一下讓他真的把筆放下。</a:t>
             </a:r>
           </a:p>
         </p:txBody>
@@ -1071,7 +1213,7 @@
           <a:lstStyle/>
           <a:p>
             <a:r>
-              <a:t>這頁是給焦慮型學員的解藥。『無限次、沒有期限』要講清楚。三遍的用法建議照著念，這是很具體的行動建議。</a:t>
+              <a:t>快速帶過即可，不要逐項念完。重點是讓學員知道『每一節都有對應頁面』，細節他自己會逛。分類提示詞那一項值得多講一句。</a:t>
             </a:r>
           </a:p>
         </p:txBody>
@@ -1141,7 +1283,7 @@
           <a:lstStyle/>
           <a:p>
             <a:r>
-              <a:t>這頁要講得輕鬆一點，帶點笑意。目的是把『跟丟＝我不行』這個聯想拆掉。</a:t>
+              <a:t>七份教材不用逐一念，指著螢幕帶過主題範圍就好。強調『這些是可下載的檔案，不是只能線上看』。網站上另有一份 Embabel 選修附錄，不列在這裡，不用主動提。</a:t>
             </a:r>
           </a:p>
         </p:txBody>
@@ -4245,8 +4387,8 @@
         </p:nvSpPr>
         <p:spPr>
           <a:xfrm>
-            <a:off x="5704027" y="3718712"/>
-            <a:ext cx="783945" cy="259080"/>
+            <a:off x="5574792" y="3718712"/>
+            <a:ext cx="1042416" cy="259080"/>
           </a:xfrm>
           <a:prstGeom prst="roundRect">
             <a:avLst>
@@ -4289,8 +4431,8 @@
         </p:nvSpPr>
         <p:spPr>
           <a:xfrm>
-            <a:off x="5704027" y="3772052"/>
-            <a:ext cx="783945" cy="167640"/>
+            <a:off x="5574792" y="3772052"/>
+            <a:ext cx="1042416" cy="167640"/>
           </a:xfrm>
           <a:prstGeom prst="rect">
             <a:avLst/>
@@ -4317,7 +4459,7 @@
                 <a:ea typeface="Microsoft JhengHei"/>
                 <a:cs typeface="Microsoft JhengHei"/>
               </a:rPr>
-              <a:t>約 6 分鐘</a:t>
+              <a:t>約 8～10 分鐘</a:t>
             </a:r>
           </a:p>
         </p:txBody>
@@ -4482,7 +4624,7 @@
                 <a:ea typeface="Microsoft JhengHei"/>
                 <a:cs typeface="Microsoft JhengHei"/>
               </a:rPr>
-              <a:t>1 / 10</a:t>
+              <a:t>1 / 12</a:t>
             </a:r>
           </a:p>
         </p:txBody>
@@ -4521,6 +4663,1555 @@
         </p:nvSpPr>
         <p:spPr>
           <a:xfrm>
+            <a:off x="548640" y="1966569"/>
+            <a:ext cx="11094720" cy="523036"/>
+          </a:xfrm>
+          <a:prstGeom prst="rect">
+            <a:avLst/>
+          </a:prstGeom>
+          <a:noFill/>
+        </p:spPr>
+        <p:txBody>
+          <a:bodyPr wrap="square" lIns="0" rIns="0" tIns="0" bIns="0" anchor="t">
+            <a:spAutoFit/>
+          </a:bodyPr>
+          <a:lstStyle/>
+          <a:p>
+            <a:pPr algn="l">
+              <a:lnSpc>
+                <a:spcPts val="4118"/>
+              </a:lnSpc>
+            </a:pPr>
+            <a:r>
+              <a:rPr sz="3120" b="1">
+                <a:solidFill>
+                  <a:srgbClr val="FFFFFF"/>
+                </a:solidFill>
+                <a:latin typeface="Microsoft JhengHei"/>
+                <a:ea typeface="Microsoft JhengHei"/>
+                <a:cs typeface="Microsoft JhengHei"/>
+              </a:rPr>
+              <a:t>影片可以無限次重複觀看</a:t>
+            </a:r>
+          </a:p>
+        </p:txBody>
+      </p:sp>
+      <p:sp>
+        <p:nvSpPr>
+          <p:cNvPr id="3" name="Rounded Rectangle 2"/>
+          <p:cNvSpPr/>
+          <p:nvPr/>
+        </p:nvSpPr>
+        <p:spPr>
+          <a:xfrm>
+            <a:off x="548640" y="2611526"/>
+            <a:ext cx="731520" cy="53340"/>
+          </a:xfrm>
+          <a:prstGeom prst="roundRect">
+            <a:avLst>
+              <a:gd name="adj" fmla="val 50000"/>
+            </a:avLst>
+          </a:prstGeom>
+          <a:solidFill>
+            <a:srgbClr val="7CB8FF"/>
+          </a:solidFill>
+          <a:ln>
+            <a:noFill/>
+          </a:ln>
+          <a:effectLst/>
+        </p:spPr>
+        <p:style>
+          <a:lnRef idx="1">
+            <a:schemeClr val="accent1"/>
+          </a:lnRef>
+          <a:fillRef idx="3">
+            <a:schemeClr val="accent1"/>
+          </a:fillRef>
+          <a:effectRef idx="2">
+            <a:schemeClr val="accent1"/>
+          </a:effectRef>
+          <a:fontRef idx="minor">
+            <a:schemeClr val="lt1"/>
+          </a:fontRef>
+        </p:style>
+        <p:txBody>
+          <a:bodyPr rtlCol="0" anchor="ctr"/>
+          <a:lstStyle/>
+          <a:p/>
+        </p:txBody>
+      </p:sp>
+      <p:sp>
+        <p:nvSpPr>
+          <p:cNvPr id="4" name="Rounded Rectangle 3"/>
+          <p:cNvSpPr/>
+          <p:nvPr/>
+        </p:nvSpPr>
+        <p:spPr>
+          <a:xfrm>
+            <a:off x="548640" y="3076346"/>
+            <a:ext cx="3444240" cy="1127760"/>
+          </a:xfrm>
+          <a:prstGeom prst="roundRect">
+            <a:avLst>
+              <a:gd name="adj" fmla="val 8108"/>
+            </a:avLst>
+          </a:prstGeom>
+          <a:solidFill>
+            <a:srgbClr val="1B2542"/>
+          </a:solidFill>
+          <a:ln w="12700">
+            <a:solidFill>
+              <a:srgbClr val="7CB8FF"/>
+            </a:solidFill>
+          </a:ln>
+          <a:effectLst/>
+        </p:spPr>
+        <p:style>
+          <a:lnRef idx="1">
+            <a:schemeClr val="accent1"/>
+          </a:lnRef>
+          <a:fillRef idx="3">
+            <a:schemeClr val="accent1"/>
+          </a:fillRef>
+          <a:effectRef idx="2">
+            <a:schemeClr val="accent1"/>
+          </a:effectRef>
+          <a:fontRef idx="minor">
+            <a:schemeClr val="lt1"/>
+          </a:fontRef>
+        </p:style>
+        <p:txBody>
+          <a:bodyPr rtlCol="0" anchor="ctr"/>
+          <a:lstStyle/>
+          <a:p/>
+        </p:txBody>
+      </p:sp>
+      <p:sp>
+        <p:nvSpPr>
+          <p:cNvPr id="5" name="TextBox 4"/>
+          <p:cNvSpPr txBox="1"/>
+          <p:nvPr/>
+        </p:nvSpPr>
+        <p:spPr>
+          <a:xfrm>
+            <a:off x="609600" y="3213506"/>
+            <a:ext cx="3322320" cy="152400"/>
+          </a:xfrm>
+          <a:prstGeom prst="rect">
+            <a:avLst/>
+          </a:prstGeom>
+          <a:noFill/>
+        </p:spPr>
+        <p:txBody>
+          <a:bodyPr wrap="square" lIns="0" rIns="0" tIns="0" bIns="0" anchor="t">
+            <a:spAutoFit/>
+          </a:bodyPr>
+          <a:lstStyle/>
+          <a:p>
+            <a:pPr algn="ctr">
+              <a:lnSpc>
+                <a:spcPts val="1176"/>
+              </a:lnSpc>
+            </a:pPr>
+            <a:r>
+              <a:rPr sz="840" b="0">
+                <a:solidFill>
+                  <a:srgbClr val="AEBFE0"/>
+                </a:solidFill>
+                <a:latin typeface="Microsoft JhengHei"/>
+                <a:ea typeface="Microsoft JhengHei"/>
+                <a:cs typeface="Microsoft JhengHei"/>
+              </a:rPr>
+              <a:t>第一遍</a:t>
+            </a:r>
+          </a:p>
+        </p:txBody>
+      </p:sp>
+      <p:sp>
+        <p:nvSpPr>
+          <p:cNvPr id="6" name="TextBox 5"/>
+          <p:cNvSpPr txBox="1"/>
+          <p:nvPr/>
+        </p:nvSpPr>
+        <p:spPr>
+          <a:xfrm>
+            <a:off x="609600" y="3396386"/>
+            <a:ext cx="3322320" cy="243840"/>
+          </a:xfrm>
+          <a:prstGeom prst="rect">
+            <a:avLst/>
+          </a:prstGeom>
+          <a:noFill/>
+        </p:spPr>
+        <p:txBody>
+          <a:bodyPr wrap="square" lIns="0" rIns="0" tIns="0" bIns="0" anchor="t">
+            <a:spAutoFit/>
+          </a:bodyPr>
+          <a:lstStyle/>
+          <a:p>
+            <a:pPr algn="ctr">
+              <a:lnSpc>
+                <a:spcPts val="1764"/>
+              </a:lnSpc>
+            </a:pPr>
+            <a:r>
+              <a:rPr sz="1260" b="1">
+                <a:solidFill>
+                  <a:srgbClr val="F4F7FF"/>
+                </a:solidFill>
+                <a:latin typeface="Microsoft JhengHei"/>
+                <a:ea typeface="Microsoft JhengHei"/>
+                <a:cs typeface="Microsoft JhengHei"/>
+              </a:rPr>
+              <a:t>純看不操作</a:t>
+            </a:r>
+          </a:p>
+        </p:txBody>
+      </p:sp>
+      <p:sp>
+        <p:nvSpPr>
+          <p:cNvPr id="7" name="TextBox 6"/>
+          <p:cNvSpPr txBox="1"/>
+          <p:nvPr/>
+        </p:nvSpPr>
+        <p:spPr>
+          <a:xfrm>
+            <a:off x="609600" y="3685946"/>
+            <a:ext cx="3322320" cy="381000"/>
+          </a:xfrm>
+          <a:prstGeom prst="rect">
+            <a:avLst/>
+          </a:prstGeom>
+          <a:noFill/>
+        </p:spPr>
+        <p:txBody>
+          <a:bodyPr wrap="square" lIns="0" rIns="0" tIns="0" bIns="0" anchor="t">
+            <a:spAutoFit/>
+          </a:bodyPr>
+          <a:lstStyle/>
+          <a:p>
+            <a:pPr algn="ctr">
+              <a:lnSpc>
+                <a:spcPts val="1395"/>
+              </a:lnSpc>
+            </a:pPr>
+            <a:r>
+              <a:rPr sz="900" b="0">
+                <a:solidFill>
+                  <a:srgbClr val="AEBFE0"/>
+                </a:solidFill>
+                <a:latin typeface="Microsoft JhengHei"/>
+                <a:ea typeface="Microsoft JhengHei"/>
+                <a:cs typeface="Microsoft JhengHei"/>
+              </a:rPr>
+              <a:t>先理解這一節在解決什麼問題</a:t>
+            </a:r>
+          </a:p>
+        </p:txBody>
+      </p:sp>
+      <p:sp>
+        <p:nvSpPr>
+          <p:cNvPr id="8" name="TextBox 7"/>
+          <p:cNvSpPr txBox="1"/>
+          <p:nvPr/>
+        </p:nvSpPr>
+        <p:spPr>
+          <a:xfrm>
+            <a:off x="4084320" y="3487826"/>
+            <a:ext cx="198120" cy="259080"/>
+          </a:xfrm>
+          <a:prstGeom prst="rect">
+            <a:avLst/>
+          </a:prstGeom>
+          <a:noFill/>
+        </p:spPr>
+        <p:txBody>
+          <a:bodyPr wrap="square" lIns="0" rIns="0" tIns="0" bIns="0" anchor="t">
+            <a:spAutoFit/>
+          </a:bodyPr>
+          <a:lstStyle/>
+          <a:p>
+            <a:pPr algn="ctr">
+              <a:lnSpc>
+                <a:spcPts val="1872"/>
+              </a:lnSpc>
+            </a:pPr>
+            <a:r>
+              <a:rPr sz="1560" b="0">
+                <a:solidFill>
+                  <a:srgbClr val="2C3A63"/>
+                </a:solidFill>
+                <a:latin typeface="Microsoft JhengHei"/>
+                <a:ea typeface="Microsoft JhengHei"/>
+                <a:cs typeface="Microsoft JhengHei"/>
+              </a:rPr>
+              <a:t>→</a:t>
+            </a:r>
+          </a:p>
+        </p:txBody>
+      </p:sp>
+      <p:sp>
+        <p:nvSpPr>
+          <p:cNvPr id="9" name="Rounded Rectangle 8"/>
+          <p:cNvSpPr/>
+          <p:nvPr/>
+        </p:nvSpPr>
+        <p:spPr>
+          <a:xfrm>
+            <a:off x="4373880" y="3076346"/>
+            <a:ext cx="3444240" cy="1127760"/>
+          </a:xfrm>
+          <a:prstGeom prst="roundRect">
+            <a:avLst>
+              <a:gd name="adj" fmla="val 8108"/>
+            </a:avLst>
+          </a:prstGeom>
+          <a:solidFill>
+            <a:srgbClr val="1B2542"/>
+          </a:solidFill>
+          <a:ln w="12700">
+            <a:solidFill>
+              <a:srgbClr val="7CB8FF"/>
+            </a:solidFill>
+          </a:ln>
+          <a:effectLst/>
+        </p:spPr>
+        <p:style>
+          <a:lnRef idx="1">
+            <a:schemeClr val="accent1"/>
+          </a:lnRef>
+          <a:fillRef idx="3">
+            <a:schemeClr val="accent1"/>
+          </a:fillRef>
+          <a:effectRef idx="2">
+            <a:schemeClr val="accent1"/>
+          </a:effectRef>
+          <a:fontRef idx="minor">
+            <a:schemeClr val="lt1"/>
+          </a:fontRef>
+        </p:style>
+        <p:txBody>
+          <a:bodyPr rtlCol="0" anchor="ctr"/>
+          <a:lstStyle/>
+          <a:p/>
+        </p:txBody>
+      </p:sp>
+      <p:sp>
+        <p:nvSpPr>
+          <p:cNvPr id="10" name="TextBox 9"/>
+          <p:cNvSpPr txBox="1"/>
+          <p:nvPr/>
+        </p:nvSpPr>
+        <p:spPr>
+          <a:xfrm>
+            <a:off x="4434840" y="3213506"/>
+            <a:ext cx="3322320" cy="152400"/>
+          </a:xfrm>
+          <a:prstGeom prst="rect">
+            <a:avLst/>
+          </a:prstGeom>
+          <a:noFill/>
+        </p:spPr>
+        <p:txBody>
+          <a:bodyPr wrap="square" lIns="0" rIns="0" tIns="0" bIns="0" anchor="t">
+            <a:spAutoFit/>
+          </a:bodyPr>
+          <a:lstStyle/>
+          <a:p>
+            <a:pPr algn="ctr">
+              <a:lnSpc>
+                <a:spcPts val="1176"/>
+              </a:lnSpc>
+            </a:pPr>
+            <a:r>
+              <a:rPr sz="840" b="0">
+                <a:solidFill>
+                  <a:srgbClr val="AEBFE0"/>
+                </a:solidFill>
+                <a:latin typeface="Microsoft JhengHei"/>
+                <a:ea typeface="Microsoft JhengHei"/>
+                <a:cs typeface="Microsoft JhengHei"/>
+              </a:rPr>
+              <a:t>第二遍</a:t>
+            </a:r>
+          </a:p>
+        </p:txBody>
+      </p:sp>
+      <p:sp>
+        <p:nvSpPr>
+          <p:cNvPr id="11" name="TextBox 10"/>
+          <p:cNvSpPr txBox="1"/>
+          <p:nvPr/>
+        </p:nvSpPr>
+        <p:spPr>
+          <a:xfrm>
+            <a:off x="4434840" y="3396386"/>
+            <a:ext cx="3322320" cy="243840"/>
+          </a:xfrm>
+          <a:prstGeom prst="rect">
+            <a:avLst/>
+          </a:prstGeom>
+          <a:noFill/>
+        </p:spPr>
+        <p:txBody>
+          <a:bodyPr wrap="square" lIns="0" rIns="0" tIns="0" bIns="0" anchor="t">
+            <a:spAutoFit/>
+          </a:bodyPr>
+          <a:lstStyle/>
+          <a:p>
+            <a:pPr algn="ctr">
+              <a:lnSpc>
+                <a:spcPts val="1764"/>
+              </a:lnSpc>
+            </a:pPr>
+            <a:r>
+              <a:rPr sz="1260" b="1">
+                <a:solidFill>
+                  <a:srgbClr val="F4F7FF"/>
+                </a:solidFill>
+                <a:latin typeface="Microsoft JhengHei"/>
+                <a:ea typeface="Microsoft JhengHei"/>
+                <a:cs typeface="Microsoft JhengHei"/>
+              </a:rPr>
+              <a:t>開著網站跟著做</a:t>
+            </a:r>
+          </a:p>
+        </p:txBody>
+      </p:sp>
+      <p:sp>
+        <p:nvSpPr>
+          <p:cNvPr id="12" name="TextBox 11"/>
+          <p:cNvSpPr txBox="1"/>
+          <p:nvPr/>
+        </p:nvSpPr>
+        <p:spPr>
+          <a:xfrm>
+            <a:off x="4434840" y="3685946"/>
+            <a:ext cx="3322320" cy="381000"/>
+          </a:xfrm>
+          <a:prstGeom prst="rect">
+            <a:avLst/>
+          </a:prstGeom>
+          <a:noFill/>
+        </p:spPr>
+        <p:txBody>
+          <a:bodyPr wrap="square" lIns="0" rIns="0" tIns="0" bIns="0" anchor="t">
+            <a:spAutoFit/>
+          </a:bodyPr>
+          <a:lstStyle/>
+          <a:p>
+            <a:pPr algn="ctr">
+              <a:lnSpc>
+                <a:spcPts val="1395"/>
+              </a:lnSpc>
+            </a:pPr>
+            <a:r>
+              <a:rPr sz="900" b="0">
+                <a:solidFill>
+                  <a:srgbClr val="AEBFE0"/>
+                </a:solidFill>
+                <a:latin typeface="Microsoft JhengHei"/>
+                <a:ea typeface="Microsoft JhengHei"/>
+                <a:cs typeface="Microsoft JhengHei"/>
+              </a:rPr>
+              <a:t>卡住就暫停，不用趕</a:t>
+            </a:r>
+          </a:p>
+        </p:txBody>
+      </p:sp>
+      <p:sp>
+        <p:nvSpPr>
+          <p:cNvPr id="13" name="TextBox 12"/>
+          <p:cNvSpPr txBox="1"/>
+          <p:nvPr/>
+        </p:nvSpPr>
+        <p:spPr>
+          <a:xfrm>
+            <a:off x="7909560" y="3487826"/>
+            <a:ext cx="198120" cy="259080"/>
+          </a:xfrm>
+          <a:prstGeom prst="rect">
+            <a:avLst/>
+          </a:prstGeom>
+          <a:noFill/>
+        </p:spPr>
+        <p:txBody>
+          <a:bodyPr wrap="square" lIns="0" rIns="0" tIns="0" bIns="0" anchor="t">
+            <a:spAutoFit/>
+          </a:bodyPr>
+          <a:lstStyle/>
+          <a:p>
+            <a:pPr algn="ctr">
+              <a:lnSpc>
+                <a:spcPts val="1872"/>
+              </a:lnSpc>
+            </a:pPr>
+            <a:r>
+              <a:rPr sz="1560" b="0">
+                <a:solidFill>
+                  <a:srgbClr val="2C3A63"/>
+                </a:solidFill>
+                <a:latin typeface="Microsoft JhengHei"/>
+                <a:ea typeface="Microsoft JhengHei"/>
+                <a:cs typeface="Microsoft JhengHei"/>
+              </a:rPr>
+              <a:t>→</a:t>
+            </a:r>
+          </a:p>
+        </p:txBody>
+      </p:sp>
+      <p:sp>
+        <p:nvSpPr>
+          <p:cNvPr id="14" name="Rounded Rectangle 13"/>
+          <p:cNvSpPr/>
+          <p:nvPr/>
+        </p:nvSpPr>
+        <p:spPr>
+          <a:xfrm>
+            <a:off x="8199120" y="3076346"/>
+            <a:ext cx="3444240" cy="1127760"/>
+          </a:xfrm>
+          <a:prstGeom prst="roundRect">
+            <a:avLst>
+              <a:gd name="adj" fmla="val 8108"/>
+            </a:avLst>
+          </a:prstGeom>
+          <a:solidFill>
+            <a:srgbClr val="1B2542"/>
+          </a:solidFill>
+          <a:ln w="12700">
+            <a:solidFill>
+              <a:srgbClr val="7CB8FF"/>
+            </a:solidFill>
+          </a:ln>
+          <a:effectLst/>
+        </p:spPr>
+        <p:style>
+          <a:lnRef idx="1">
+            <a:schemeClr val="accent1"/>
+          </a:lnRef>
+          <a:fillRef idx="3">
+            <a:schemeClr val="accent1"/>
+          </a:fillRef>
+          <a:effectRef idx="2">
+            <a:schemeClr val="accent1"/>
+          </a:effectRef>
+          <a:fontRef idx="minor">
+            <a:schemeClr val="lt1"/>
+          </a:fontRef>
+        </p:style>
+        <p:txBody>
+          <a:bodyPr rtlCol="0" anchor="ctr"/>
+          <a:lstStyle/>
+          <a:p/>
+        </p:txBody>
+      </p:sp>
+      <p:sp>
+        <p:nvSpPr>
+          <p:cNvPr id="15" name="TextBox 14"/>
+          <p:cNvSpPr txBox="1"/>
+          <p:nvPr/>
+        </p:nvSpPr>
+        <p:spPr>
+          <a:xfrm>
+            <a:off x="8260080" y="3213506"/>
+            <a:ext cx="3322320" cy="152400"/>
+          </a:xfrm>
+          <a:prstGeom prst="rect">
+            <a:avLst/>
+          </a:prstGeom>
+          <a:noFill/>
+        </p:spPr>
+        <p:txBody>
+          <a:bodyPr wrap="square" lIns="0" rIns="0" tIns="0" bIns="0" anchor="t">
+            <a:spAutoFit/>
+          </a:bodyPr>
+          <a:lstStyle/>
+          <a:p>
+            <a:pPr algn="ctr">
+              <a:lnSpc>
+                <a:spcPts val="1176"/>
+              </a:lnSpc>
+            </a:pPr>
+            <a:r>
+              <a:rPr sz="840" b="0">
+                <a:solidFill>
+                  <a:srgbClr val="AEBFE0"/>
+                </a:solidFill>
+                <a:latin typeface="Microsoft JhengHei"/>
+                <a:ea typeface="Microsoft JhengHei"/>
+                <a:cs typeface="Microsoft JhengHei"/>
+              </a:rPr>
+              <a:t>之後</a:t>
+            </a:r>
+          </a:p>
+        </p:txBody>
+      </p:sp>
+      <p:sp>
+        <p:nvSpPr>
+          <p:cNvPr id="16" name="TextBox 15"/>
+          <p:cNvSpPr txBox="1"/>
+          <p:nvPr/>
+        </p:nvSpPr>
+        <p:spPr>
+          <a:xfrm>
+            <a:off x="8260080" y="3396386"/>
+            <a:ext cx="3322320" cy="243840"/>
+          </a:xfrm>
+          <a:prstGeom prst="rect">
+            <a:avLst/>
+          </a:prstGeom>
+          <a:noFill/>
+        </p:spPr>
+        <p:txBody>
+          <a:bodyPr wrap="square" lIns="0" rIns="0" tIns="0" bIns="0" anchor="t">
+            <a:spAutoFit/>
+          </a:bodyPr>
+          <a:lstStyle/>
+          <a:p>
+            <a:pPr algn="ctr">
+              <a:lnSpc>
+                <a:spcPts val="1764"/>
+              </a:lnSpc>
+            </a:pPr>
+            <a:r>
+              <a:rPr sz="1260" b="1">
+                <a:solidFill>
+                  <a:srgbClr val="F4F7FF"/>
+                </a:solidFill>
+                <a:latin typeface="Microsoft JhengHei"/>
+                <a:ea typeface="Microsoft JhengHei"/>
+                <a:cs typeface="Microsoft JhengHei"/>
+              </a:rPr>
+              <a:t>只回放特定段落</a:t>
+            </a:r>
+          </a:p>
+        </p:txBody>
+      </p:sp>
+      <p:sp>
+        <p:nvSpPr>
+          <p:cNvPr id="17" name="TextBox 16"/>
+          <p:cNvSpPr txBox="1"/>
+          <p:nvPr/>
+        </p:nvSpPr>
+        <p:spPr>
+          <a:xfrm>
+            <a:off x="8260080" y="3685946"/>
+            <a:ext cx="3322320" cy="381000"/>
+          </a:xfrm>
+          <a:prstGeom prst="rect">
+            <a:avLst/>
+          </a:prstGeom>
+          <a:noFill/>
+        </p:spPr>
+        <p:txBody>
+          <a:bodyPr wrap="square" lIns="0" rIns="0" tIns="0" bIns="0" anchor="t">
+            <a:spAutoFit/>
+          </a:bodyPr>
+          <a:lstStyle/>
+          <a:p>
+            <a:pPr algn="ctr">
+              <a:lnSpc>
+                <a:spcPts val="1395"/>
+              </a:lnSpc>
+            </a:pPr>
+            <a:r>
+              <a:rPr sz="900" b="0">
+                <a:solidFill>
+                  <a:srgbClr val="AEBFE0"/>
+                </a:solidFill>
+                <a:latin typeface="Microsoft JhengHei"/>
+                <a:ea typeface="Microsoft JhengHei"/>
+                <a:cs typeface="Microsoft JhengHei"/>
+              </a:rPr>
+              <a:t>其他時候直接查網站</a:t>
+            </a:r>
+          </a:p>
+        </p:txBody>
+      </p:sp>
+      <p:sp>
+        <p:nvSpPr>
+          <p:cNvPr id="18" name="TextBox 17"/>
+          <p:cNvSpPr txBox="1"/>
+          <p:nvPr/>
+        </p:nvSpPr>
+        <p:spPr>
+          <a:xfrm>
+            <a:off x="548640" y="4402226"/>
+            <a:ext cx="11094720" cy="336803"/>
+          </a:xfrm>
+          <a:prstGeom prst="rect">
+            <a:avLst/>
+          </a:prstGeom>
+          <a:noFill/>
+        </p:spPr>
+        <p:txBody>
+          <a:bodyPr wrap="square" lIns="0" rIns="0" tIns="0" bIns="0" anchor="t">
+            <a:spAutoFit/>
+          </a:bodyPr>
+          <a:lstStyle/>
+          <a:p>
+            <a:pPr algn="l">
+              <a:lnSpc>
+                <a:spcPts val="2652"/>
+              </a:lnSpc>
+            </a:pPr>
+            <a:r>
+              <a:rPr sz="1560" b="0">
+                <a:solidFill>
+                  <a:srgbClr val="AEBFE0"/>
+                </a:solidFill>
+                <a:latin typeface="Microsoft JhengHei"/>
+                <a:ea typeface="Microsoft JhengHei"/>
+                <a:cs typeface="Microsoft JhengHei"/>
+              </a:rPr>
+              <a:t>沒有觀看期限。</a:t>
+            </a:r>
+          </a:p>
+        </p:txBody>
+      </p:sp>
+      <p:sp>
+        <p:nvSpPr>
+          <p:cNvPr id="19" name="Rectangle 18"/>
+          <p:cNvSpPr/>
+          <p:nvPr/>
+        </p:nvSpPr>
+        <p:spPr>
+          <a:xfrm>
+            <a:off x="0" y="6507480"/>
+            <a:ext cx="12192000" cy="350520"/>
+          </a:xfrm>
+          <a:prstGeom prst="rect">
+            <a:avLst/>
+          </a:prstGeom>
+          <a:solidFill>
+            <a:srgbClr val="060A16"/>
+          </a:solidFill>
+          <a:ln>
+            <a:noFill/>
+          </a:ln>
+          <a:effectLst/>
+        </p:spPr>
+        <p:style>
+          <a:lnRef idx="1">
+            <a:schemeClr val="accent1"/>
+          </a:lnRef>
+          <a:fillRef idx="3">
+            <a:schemeClr val="accent1"/>
+          </a:fillRef>
+          <a:effectRef idx="2">
+            <a:schemeClr val="accent1"/>
+          </a:effectRef>
+          <a:fontRef idx="minor">
+            <a:schemeClr val="lt1"/>
+          </a:fontRef>
+        </p:style>
+        <p:txBody>
+          <a:bodyPr rtlCol="0" anchor="ctr"/>
+          <a:lstStyle/>
+          <a:p/>
+        </p:txBody>
+      </p:sp>
+      <p:sp>
+        <p:nvSpPr>
+          <p:cNvPr id="20" name="TextBox 19"/>
+          <p:cNvSpPr txBox="1"/>
+          <p:nvPr/>
+        </p:nvSpPr>
+        <p:spPr>
+          <a:xfrm>
+            <a:off x="182880" y="6606540"/>
+            <a:ext cx="3048000" cy="167640"/>
+          </a:xfrm>
+          <a:prstGeom prst="rect">
+            <a:avLst/>
+          </a:prstGeom>
+          <a:noFill/>
+        </p:spPr>
+        <p:txBody>
+          <a:bodyPr wrap="square" lIns="0" rIns="0" tIns="0" bIns="0" anchor="t">
+            <a:spAutoFit/>
+          </a:bodyPr>
+          <a:lstStyle/>
+          <a:p>
+            <a:pPr algn="l">
+              <a:lnSpc>
+                <a:spcPts val="1008"/>
+              </a:lnSpc>
+            </a:pPr>
+            <a:r>
+              <a:rPr sz="840" b="0">
+                <a:solidFill>
+                  <a:srgbClr val="7CB8FF"/>
+                </a:solidFill>
+                <a:latin typeface="Microsoft JhengHei"/>
+                <a:ea typeface="Microsoft JhengHei"/>
+                <a:cs typeface="Microsoft JhengHei"/>
+              </a:rPr>
+              <a:t>看片方式</a:t>
+            </a:r>
+          </a:p>
+        </p:txBody>
+      </p:sp>
+      <p:sp>
+        <p:nvSpPr>
+          <p:cNvPr id="21" name="TextBox 20"/>
+          <p:cNvSpPr txBox="1"/>
+          <p:nvPr/>
+        </p:nvSpPr>
+        <p:spPr>
+          <a:xfrm>
+            <a:off x="8961120" y="6606540"/>
+            <a:ext cx="3048000" cy="167640"/>
+          </a:xfrm>
+          <a:prstGeom prst="rect">
+            <a:avLst/>
+          </a:prstGeom>
+          <a:noFill/>
+        </p:spPr>
+        <p:txBody>
+          <a:bodyPr wrap="square" lIns="0" rIns="0" tIns="0" bIns="0" anchor="t">
+            <a:spAutoFit/>
+          </a:bodyPr>
+          <a:lstStyle/>
+          <a:p>
+            <a:pPr algn="l">
+              <a:lnSpc>
+                <a:spcPts val="1008"/>
+              </a:lnSpc>
+            </a:pPr>
+            <a:r>
+              <a:rPr sz="840" b="0">
+                <a:solidFill>
+                  <a:srgbClr val="AEBFE0"/>
+                </a:solidFill>
+                <a:latin typeface="Microsoft JhengHei"/>
+                <a:ea typeface="Microsoft JhengHei"/>
+                <a:cs typeface="Microsoft JhengHei"/>
+              </a:rPr>
+              <a:t>10 / 12</a:t>
+            </a:r>
+          </a:p>
+        </p:txBody>
+      </p:sp>
+    </p:spTree>
+  </p:cSld>
+  <p:clrMapOvr>
+    <a:masterClrMapping/>
+  </p:clrMapOvr>
+</p:sld>
+</file>
+
+<file path=ppt/slides/slide11.xml><?xml version="1.0" encoding="utf-8"?>
+<p:sld xmlns:a="http://schemas.openxmlformats.org/drawingml/2006/main" xmlns:p="http://schemas.openxmlformats.org/presentationml/2006/main" xmlns:r="http://schemas.openxmlformats.org/officeDocument/2006/relationships">
+  <p:cSld>
+    <p:bg>
+      <p:bgPr>
+        <a:solidFill>
+          <a:srgbClr val="05070F"/>
+        </a:solidFill>
+        <a:effectLst/>
+      </p:bgPr>
+    </p:bg>
+    <p:spTree>
+      <p:nvGrpSpPr>
+        <p:cNvPr id="1" name=""/>
+        <p:cNvGrpSpPr/>
+        <p:nvPr/>
+      </p:nvGrpSpPr>
+      <p:grpSpPr/>
+      <p:sp>
+        <p:nvSpPr>
+          <p:cNvPr id="2" name="TextBox 1"/>
+          <p:cNvSpPr txBox="1"/>
+          <p:nvPr/>
+        </p:nvSpPr>
+        <p:spPr>
+          <a:xfrm>
+            <a:off x="548640" y="1764258"/>
+            <a:ext cx="11094720" cy="523036"/>
+          </a:xfrm>
+          <a:prstGeom prst="rect">
+            <a:avLst/>
+          </a:prstGeom>
+          <a:noFill/>
+        </p:spPr>
+        <p:txBody>
+          <a:bodyPr wrap="square" lIns="0" rIns="0" tIns="0" bIns="0" anchor="t">
+            <a:spAutoFit/>
+          </a:bodyPr>
+          <a:lstStyle/>
+          <a:p>
+            <a:pPr algn="l">
+              <a:lnSpc>
+                <a:spcPts val="4118"/>
+              </a:lnSpc>
+            </a:pPr>
+            <a:r>
+              <a:rPr sz="3120" b="1">
+                <a:solidFill>
+                  <a:srgbClr val="FFFFFF"/>
+                </a:solidFill>
+                <a:latin typeface="Microsoft JhengHei"/>
+                <a:ea typeface="Microsoft JhengHei"/>
+                <a:cs typeface="Microsoft JhengHei"/>
+              </a:rPr>
+              <a:t>跟丟了怎麼辦？</a:t>
+            </a:r>
+          </a:p>
+        </p:txBody>
+      </p:sp>
+      <p:sp>
+        <p:nvSpPr>
+          <p:cNvPr id="3" name="Rounded Rectangle 2"/>
+          <p:cNvSpPr/>
+          <p:nvPr/>
+        </p:nvSpPr>
+        <p:spPr>
+          <a:xfrm>
+            <a:off x="548640" y="2409215"/>
+            <a:ext cx="731520" cy="53340"/>
+          </a:xfrm>
+          <a:prstGeom prst="roundRect">
+            <a:avLst>
+              <a:gd name="adj" fmla="val 50000"/>
+            </a:avLst>
+          </a:prstGeom>
+          <a:solidFill>
+            <a:srgbClr val="7CB8FF"/>
+          </a:solidFill>
+          <a:ln>
+            <a:noFill/>
+          </a:ln>
+          <a:effectLst/>
+        </p:spPr>
+        <p:style>
+          <a:lnRef idx="1">
+            <a:schemeClr val="accent1"/>
+          </a:lnRef>
+          <a:fillRef idx="3">
+            <a:schemeClr val="accent1"/>
+          </a:fillRef>
+          <a:effectRef idx="2">
+            <a:schemeClr val="accent1"/>
+          </a:effectRef>
+          <a:fontRef idx="minor">
+            <a:schemeClr val="lt1"/>
+          </a:fontRef>
+        </p:style>
+        <p:txBody>
+          <a:bodyPr rtlCol="0" anchor="ctr"/>
+          <a:lstStyle/>
+          <a:p/>
+        </p:txBody>
+      </p:sp>
+      <p:sp>
+        <p:nvSpPr>
+          <p:cNvPr id="4" name="Rounded Rectangle 3"/>
+          <p:cNvSpPr/>
+          <p:nvPr/>
+        </p:nvSpPr>
+        <p:spPr>
+          <a:xfrm>
+            <a:off x="548640" y="2813075"/>
+            <a:ext cx="11094720" cy="615696"/>
+          </a:xfrm>
+          <a:prstGeom prst="roundRect">
+            <a:avLst>
+              <a:gd name="adj" fmla="val 14851"/>
+            </a:avLst>
+          </a:prstGeom>
+          <a:solidFill>
+            <a:srgbClr val="131B33"/>
+          </a:solidFill>
+          <a:ln>
+            <a:noFill/>
+          </a:ln>
+          <a:effectLst/>
+        </p:spPr>
+        <p:style>
+          <a:lnRef idx="1">
+            <a:schemeClr val="accent1"/>
+          </a:lnRef>
+          <a:fillRef idx="3">
+            <a:schemeClr val="accent1"/>
+          </a:fillRef>
+          <a:effectRef idx="2">
+            <a:schemeClr val="accent1"/>
+          </a:effectRef>
+          <a:fontRef idx="minor">
+            <a:schemeClr val="lt1"/>
+          </a:fontRef>
+        </p:style>
+        <p:txBody>
+          <a:bodyPr rtlCol="0" anchor="ctr"/>
+          <a:lstStyle/>
+          <a:p/>
+        </p:txBody>
+      </p:sp>
+      <p:sp>
+        <p:nvSpPr>
+          <p:cNvPr id="5" name="Rectangle 4"/>
+          <p:cNvSpPr/>
+          <p:nvPr/>
+        </p:nvSpPr>
+        <p:spPr>
+          <a:xfrm>
+            <a:off x="548640" y="2813075"/>
+            <a:ext cx="45720" cy="615696"/>
+          </a:xfrm>
+          <a:prstGeom prst="rect">
+            <a:avLst/>
+          </a:prstGeom>
+          <a:solidFill>
+            <a:srgbClr val="FF8A80"/>
+          </a:solidFill>
+          <a:ln>
+            <a:noFill/>
+          </a:ln>
+          <a:effectLst/>
+        </p:spPr>
+        <p:style>
+          <a:lnRef idx="1">
+            <a:schemeClr val="accent1"/>
+          </a:lnRef>
+          <a:fillRef idx="3">
+            <a:schemeClr val="accent1"/>
+          </a:fillRef>
+          <a:effectRef idx="2">
+            <a:schemeClr val="accent1"/>
+          </a:effectRef>
+          <a:fontRef idx="minor">
+            <a:schemeClr val="lt1"/>
+          </a:fontRef>
+        </p:style>
+        <p:txBody>
+          <a:bodyPr rtlCol="0" anchor="ctr"/>
+          <a:lstStyle/>
+          <a:p/>
+        </p:txBody>
+      </p:sp>
+      <p:sp>
+        <p:nvSpPr>
+          <p:cNvPr id="6" name="TextBox 5"/>
+          <p:cNvSpPr txBox="1"/>
+          <p:nvPr/>
+        </p:nvSpPr>
+        <p:spPr>
+          <a:xfrm>
+            <a:off x="777240" y="2965475"/>
+            <a:ext cx="10683240" cy="310896"/>
+          </a:xfrm>
+          <a:prstGeom prst="rect">
+            <a:avLst/>
+          </a:prstGeom>
+          <a:noFill/>
+        </p:spPr>
+        <p:txBody>
+          <a:bodyPr wrap="square" lIns="0" rIns="0" tIns="0" bIns="0" anchor="ctr">
+            <a:spAutoFit/>
+          </a:bodyPr>
+          <a:lstStyle/>
+          <a:p>
+            <a:pPr algn="l">
+              <a:lnSpc>
+                <a:spcPts val="2448"/>
+              </a:lnSpc>
+            </a:pPr>
+            <a:r>
+              <a:rPr sz="1440" b="1">
+                <a:solidFill>
+                  <a:srgbClr val="FFB4AE"/>
+                </a:solidFill>
+                <a:latin typeface="Microsoft JhengHei"/>
+                <a:ea typeface="Microsoft JhengHei"/>
+                <a:cs typeface="Microsoft JhengHei"/>
+              </a:rPr>
+              <a:t>不要</a:t>
+            </a:r>
+            <a:r>
+              <a:rPr sz="1440" b="0">
+                <a:solidFill>
+                  <a:srgbClr val="FFB4AE"/>
+                </a:solidFill>
+                <a:latin typeface="Microsoft JhengHei"/>
+                <a:ea typeface="Microsoft JhengHei"/>
+                <a:cs typeface="Microsoft JhengHei"/>
+              </a:rPr>
+              <a:t>  </a:t>
+            </a:r>
+            <a:r>
+              <a:rPr sz="1440" b="0">
+                <a:solidFill>
+                  <a:srgbClr val="FFB4AE"/>
+                </a:solidFill>
+                <a:latin typeface="Microsoft JhengHei"/>
+                <a:ea typeface="Microsoft JhengHei"/>
+                <a:cs typeface="Microsoft JhengHei"/>
+              </a:rPr>
+              <a:t>慌著暫停、倒帶、追進度——越追越亂</a:t>
+            </a:r>
+          </a:p>
+        </p:txBody>
+      </p:sp>
+      <p:sp>
+        <p:nvSpPr>
+          <p:cNvPr id="7" name="Rounded Rectangle 6"/>
+          <p:cNvSpPr/>
+          <p:nvPr/>
+        </p:nvSpPr>
+        <p:spPr>
+          <a:xfrm>
+            <a:off x="548640" y="3565931"/>
+            <a:ext cx="11094720" cy="615696"/>
+          </a:xfrm>
+          <a:prstGeom prst="roundRect">
+            <a:avLst>
+              <a:gd name="adj" fmla="val 14851"/>
+            </a:avLst>
+          </a:prstGeom>
+          <a:solidFill>
+            <a:srgbClr val="131B33"/>
+          </a:solidFill>
+          <a:ln>
+            <a:noFill/>
+          </a:ln>
+          <a:effectLst/>
+        </p:spPr>
+        <p:style>
+          <a:lnRef idx="1">
+            <a:schemeClr val="accent1"/>
+          </a:lnRef>
+          <a:fillRef idx="3">
+            <a:schemeClr val="accent1"/>
+          </a:fillRef>
+          <a:effectRef idx="2">
+            <a:schemeClr val="accent1"/>
+          </a:effectRef>
+          <a:fontRef idx="minor">
+            <a:schemeClr val="lt1"/>
+          </a:fontRef>
+        </p:style>
+        <p:txBody>
+          <a:bodyPr rtlCol="0" anchor="ctr"/>
+          <a:lstStyle/>
+          <a:p/>
+        </p:txBody>
+      </p:sp>
+      <p:sp>
+        <p:nvSpPr>
+          <p:cNvPr id="8" name="Rectangle 7"/>
+          <p:cNvSpPr/>
+          <p:nvPr/>
+        </p:nvSpPr>
+        <p:spPr>
+          <a:xfrm>
+            <a:off x="548640" y="3565931"/>
+            <a:ext cx="45720" cy="615696"/>
+          </a:xfrm>
+          <a:prstGeom prst="rect">
+            <a:avLst/>
+          </a:prstGeom>
+          <a:solidFill>
+            <a:srgbClr val="57F097"/>
+          </a:solidFill>
+          <a:ln>
+            <a:noFill/>
+          </a:ln>
+          <a:effectLst/>
+        </p:spPr>
+        <p:style>
+          <a:lnRef idx="1">
+            <a:schemeClr val="accent1"/>
+          </a:lnRef>
+          <a:fillRef idx="3">
+            <a:schemeClr val="accent1"/>
+          </a:fillRef>
+          <a:effectRef idx="2">
+            <a:schemeClr val="accent1"/>
+          </a:effectRef>
+          <a:fontRef idx="minor">
+            <a:schemeClr val="lt1"/>
+          </a:fontRef>
+        </p:style>
+        <p:txBody>
+          <a:bodyPr rtlCol="0" anchor="ctr"/>
+          <a:lstStyle/>
+          <a:p/>
+        </p:txBody>
+      </p:sp>
+      <p:sp>
+        <p:nvSpPr>
+          <p:cNvPr id="9" name="TextBox 8"/>
+          <p:cNvSpPr txBox="1"/>
+          <p:nvPr/>
+        </p:nvSpPr>
+        <p:spPr>
+          <a:xfrm>
+            <a:off x="777240" y="3718331"/>
+            <a:ext cx="10683240" cy="310896"/>
+          </a:xfrm>
+          <a:prstGeom prst="rect">
+            <a:avLst/>
+          </a:prstGeom>
+          <a:noFill/>
+        </p:spPr>
+        <p:txBody>
+          <a:bodyPr wrap="square" lIns="0" rIns="0" tIns="0" bIns="0" anchor="ctr">
+            <a:spAutoFit/>
+          </a:bodyPr>
+          <a:lstStyle/>
+          <a:p>
+            <a:pPr algn="l">
+              <a:lnSpc>
+                <a:spcPts val="2448"/>
+              </a:lnSpc>
+            </a:pPr>
+            <a:r>
+              <a:rPr sz="1440" b="1">
+                <a:solidFill>
+                  <a:srgbClr val="BBF7D0"/>
+                </a:solidFill>
+                <a:latin typeface="Microsoft JhengHei"/>
+                <a:ea typeface="Microsoft JhengHei"/>
+                <a:cs typeface="Microsoft JhengHei"/>
+              </a:rPr>
+              <a:t>要</a:t>
+            </a:r>
+            <a:r>
+              <a:rPr sz="1440" b="1">
+                <a:solidFill>
+                  <a:srgbClr val="BBF7D0"/>
+                </a:solidFill>
+                <a:latin typeface="Microsoft JhengHei"/>
+                <a:ea typeface="Microsoft JhengHei"/>
+                <a:cs typeface="Microsoft JhengHei"/>
+              </a:rPr>
+              <a:t>  </a:t>
+            </a:r>
+            <a:r>
+              <a:rPr sz="1440" b="1">
+                <a:solidFill>
+                  <a:srgbClr val="BBF7D0"/>
+                </a:solidFill>
+                <a:latin typeface="Microsoft JhengHei"/>
+                <a:ea typeface="Microsoft JhengHei"/>
+                <a:cs typeface="Microsoft JhengHei"/>
+              </a:rPr>
+              <a:t>先把這一節看完，理解我在幹嘛，之後再回來慢慢做</a:t>
+            </a:r>
+          </a:p>
+        </p:txBody>
+      </p:sp>
+      <p:sp>
+        <p:nvSpPr>
+          <p:cNvPr id="10" name="Rounded Rectangle 9"/>
+          <p:cNvSpPr/>
+          <p:nvPr/>
+        </p:nvSpPr>
+        <p:spPr>
+          <a:xfrm>
+            <a:off x="548640" y="4501667"/>
+            <a:ext cx="11094720" cy="439674"/>
+          </a:xfrm>
+          <a:prstGeom prst="roundRect">
+            <a:avLst>
+              <a:gd name="adj" fmla="val 17331"/>
+            </a:avLst>
+          </a:prstGeom>
+          <a:solidFill>
+            <a:srgbClr val="101A36"/>
+          </a:solidFill>
+          <a:ln w="12700">
+            <a:solidFill>
+              <a:srgbClr val="2C3A63"/>
+            </a:solidFill>
+          </a:ln>
+          <a:effectLst/>
+        </p:spPr>
+        <p:style>
+          <a:lnRef idx="1">
+            <a:schemeClr val="accent1"/>
+          </a:lnRef>
+          <a:fillRef idx="3">
+            <a:schemeClr val="accent1"/>
+          </a:fillRef>
+          <a:effectRef idx="2">
+            <a:schemeClr val="accent1"/>
+          </a:effectRef>
+          <a:fontRef idx="minor">
+            <a:schemeClr val="lt1"/>
+          </a:fontRef>
+        </p:style>
+        <p:txBody>
+          <a:bodyPr rtlCol="0" anchor="ctr"/>
+          <a:lstStyle/>
+          <a:p/>
+        </p:txBody>
+      </p:sp>
+      <p:sp>
+        <p:nvSpPr>
+          <p:cNvPr id="11" name="Rectangle 10"/>
+          <p:cNvSpPr/>
+          <p:nvPr/>
+        </p:nvSpPr>
+        <p:spPr>
+          <a:xfrm>
+            <a:off x="548640" y="4501667"/>
+            <a:ext cx="38100" cy="439674"/>
+          </a:xfrm>
+          <a:prstGeom prst="rect">
+            <a:avLst/>
+          </a:prstGeom>
+          <a:solidFill>
+            <a:srgbClr val="7CB8FF"/>
+          </a:solidFill>
+          <a:ln>
+            <a:noFill/>
+          </a:ln>
+          <a:effectLst/>
+        </p:spPr>
+        <p:style>
+          <a:lnRef idx="1">
+            <a:schemeClr val="accent1"/>
+          </a:lnRef>
+          <a:fillRef idx="3">
+            <a:schemeClr val="accent1"/>
+          </a:fillRef>
+          <a:effectRef idx="2">
+            <a:schemeClr val="accent1"/>
+          </a:effectRef>
+          <a:fontRef idx="minor">
+            <a:schemeClr val="lt1"/>
+          </a:fontRef>
+        </p:style>
+        <p:txBody>
+          <a:bodyPr rtlCol="0" anchor="ctr"/>
+          <a:lstStyle/>
+          <a:p/>
+        </p:txBody>
+      </p:sp>
+      <p:sp>
+        <p:nvSpPr>
+          <p:cNvPr id="12" name="TextBox 11"/>
+          <p:cNvSpPr txBox="1"/>
+          <p:nvPr/>
+        </p:nvSpPr>
+        <p:spPr>
+          <a:xfrm>
+            <a:off x="739140" y="4608347"/>
+            <a:ext cx="10713720" cy="226314"/>
+          </a:xfrm>
+          <a:prstGeom prst="rect">
+            <a:avLst/>
+          </a:prstGeom>
+          <a:noFill/>
+        </p:spPr>
+        <p:txBody>
+          <a:bodyPr wrap="square" lIns="0" rIns="0" tIns="0" bIns="0" anchor="ctr">
+            <a:spAutoFit/>
+          </a:bodyPr>
+          <a:lstStyle/>
+          <a:p>
+            <a:pPr algn="l">
+              <a:lnSpc>
+                <a:spcPts val="1782"/>
+              </a:lnSpc>
+            </a:pPr>
+            <a:r>
+              <a:rPr sz="1080" b="0">
+                <a:solidFill>
+                  <a:srgbClr val="AEBFE0"/>
+                </a:solidFill>
+                <a:latin typeface="Microsoft JhengHei"/>
+                <a:ea typeface="Microsoft JhengHei"/>
+                <a:cs typeface="Microsoft JhengHei"/>
+              </a:rPr>
+              <a:t>我示範的節奏</a:t>
+            </a:r>
+            <a:r>
+              <a:rPr sz="1080" b="1">
+                <a:solidFill>
+                  <a:srgbClr val="7CB8FF"/>
+                </a:solidFill>
+                <a:latin typeface="Microsoft JhengHei"/>
+                <a:ea typeface="Microsoft JhengHei"/>
+                <a:cs typeface="Microsoft JhengHei"/>
+              </a:rPr>
+              <a:t>一定</a:t>
+            </a:r>
+            <a:r>
+              <a:rPr sz="1080" b="0">
+                <a:solidFill>
+                  <a:srgbClr val="AEBFE0"/>
+                </a:solidFill>
+                <a:latin typeface="Microsoft JhengHei"/>
+                <a:ea typeface="Microsoft JhengHei"/>
+                <a:cs typeface="Microsoft JhengHei"/>
+              </a:rPr>
+              <a:t>比你自己動手快，這是正常的。你有無限次的機會。</a:t>
+            </a:r>
+          </a:p>
+        </p:txBody>
+      </p:sp>
+      <p:sp>
+        <p:nvSpPr>
+          <p:cNvPr id="13" name="Rectangle 12"/>
+          <p:cNvSpPr/>
+          <p:nvPr/>
+        </p:nvSpPr>
+        <p:spPr>
+          <a:xfrm>
+            <a:off x="0" y="6507480"/>
+            <a:ext cx="12192000" cy="350520"/>
+          </a:xfrm>
+          <a:prstGeom prst="rect">
+            <a:avLst/>
+          </a:prstGeom>
+          <a:solidFill>
+            <a:srgbClr val="060A16"/>
+          </a:solidFill>
+          <a:ln>
+            <a:noFill/>
+          </a:ln>
+          <a:effectLst/>
+        </p:spPr>
+        <p:style>
+          <a:lnRef idx="1">
+            <a:schemeClr val="accent1"/>
+          </a:lnRef>
+          <a:fillRef idx="3">
+            <a:schemeClr val="accent1"/>
+          </a:fillRef>
+          <a:effectRef idx="2">
+            <a:schemeClr val="accent1"/>
+          </a:effectRef>
+          <a:fontRef idx="minor">
+            <a:schemeClr val="lt1"/>
+          </a:fontRef>
+        </p:style>
+        <p:txBody>
+          <a:bodyPr rtlCol="0" anchor="ctr"/>
+          <a:lstStyle/>
+          <a:p/>
+        </p:txBody>
+      </p:sp>
+      <p:sp>
+        <p:nvSpPr>
+          <p:cNvPr id="14" name="TextBox 13"/>
+          <p:cNvSpPr txBox="1"/>
+          <p:nvPr/>
+        </p:nvSpPr>
+        <p:spPr>
+          <a:xfrm>
+            <a:off x="182880" y="6606540"/>
+            <a:ext cx="3048000" cy="167640"/>
+          </a:xfrm>
+          <a:prstGeom prst="rect">
+            <a:avLst/>
+          </a:prstGeom>
+          <a:noFill/>
+        </p:spPr>
+        <p:txBody>
+          <a:bodyPr wrap="square" lIns="0" rIns="0" tIns="0" bIns="0" anchor="t">
+            <a:spAutoFit/>
+          </a:bodyPr>
+          <a:lstStyle/>
+          <a:p>
+            <a:pPr algn="l">
+              <a:lnSpc>
+                <a:spcPts val="1008"/>
+              </a:lnSpc>
+            </a:pPr>
+            <a:r>
+              <a:rPr sz="840" b="0">
+                <a:solidFill>
+                  <a:srgbClr val="7CB8FF"/>
+                </a:solidFill>
+                <a:latin typeface="Microsoft JhengHei"/>
+                <a:ea typeface="Microsoft JhengHei"/>
+                <a:cs typeface="Microsoft JhengHei"/>
+              </a:rPr>
+              <a:t>看片方式</a:t>
+            </a:r>
+          </a:p>
+        </p:txBody>
+      </p:sp>
+      <p:sp>
+        <p:nvSpPr>
+          <p:cNvPr id="15" name="TextBox 14"/>
+          <p:cNvSpPr txBox="1"/>
+          <p:nvPr/>
+        </p:nvSpPr>
+        <p:spPr>
+          <a:xfrm>
+            <a:off x="8961120" y="6606540"/>
+            <a:ext cx="3048000" cy="167640"/>
+          </a:xfrm>
+          <a:prstGeom prst="rect">
+            <a:avLst/>
+          </a:prstGeom>
+          <a:noFill/>
+        </p:spPr>
+        <p:txBody>
+          <a:bodyPr wrap="square" lIns="0" rIns="0" tIns="0" bIns="0" anchor="t">
+            <a:spAutoFit/>
+          </a:bodyPr>
+          <a:lstStyle/>
+          <a:p>
+            <a:pPr algn="l">
+              <a:lnSpc>
+                <a:spcPts val="1008"/>
+              </a:lnSpc>
+            </a:pPr>
+            <a:r>
+              <a:rPr sz="840" b="0">
+                <a:solidFill>
+                  <a:srgbClr val="AEBFE0"/>
+                </a:solidFill>
+                <a:latin typeface="Microsoft JhengHei"/>
+                <a:ea typeface="Microsoft JhengHei"/>
+                <a:cs typeface="Microsoft JhengHei"/>
+              </a:rPr>
+              <a:t>11 / 12</a:t>
+            </a:r>
+          </a:p>
+        </p:txBody>
+      </p:sp>
+    </p:spTree>
+  </p:cSld>
+  <p:clrMapOvr>
+    <a:masterClrMapping/>
+  </p:clrMapOvr>
+</p:sld>
+</file>
+
+<file path=ppt/slides/slide12.xml><?xml version="1.0" encoding="utf-8"?>
+<p:sld xmlns:a="http://schemas.openxmlformats.org/drawingml/2006/main" xmlns:p="http://schemas.openxmlformats.org/presentationml/2006/main" xmlns:r="http://schemas.openxmlformats.org/officeDocument/2006/relationships">
+  <p:cSld>
+    <p:bg>
+      <p:bgPr>
+        <a:solidFill>
+          <a:srgbClr val="05070F"/>
+        </a:solidFill>
+        <a:effectLst/>
+      </p:bgPr>
+    </p:bg>
+    <p:spTree>
+      <p:nvGrpSpPr>
+        <p:cNvPr id="1" name=""/>
+        <p:cNvGrpSpPr/>
+        <p:nvPr/>
+      </p:nvGrpSpPr>
+      <p:grpSpPr/>
+      <p:sp>
+        <p:nvSpPr>
+          <p:cNvPr id="2" name="TextBox 1"/>
+          <p:cNvSpPr txBox="1"/>
+          <p:nvPr/>
+        </p:nvSpPr>
+        <p:spPr>
+          <a:xfrm>
             <a:off x="548640" y="2560167"/>
             <a:ext cx="11094720" cy="523036"/>
           </a:xfrm>
@@ -4776,7 +6467,7 @@
                 <a:ea typeface="Microsoft JhengHei"/>
                 <a:cs typeface="Microsoft JhengHei"/>
               </a:rPr>
-              <a:t>10 / 10</a:t>
+              <a:t>12 / 12</a:t>
             </a:r>
           </a:p>
         </p:txBody>
@@ -4815,6 +6506,1367 @@
         </p:nvSpPr>
         <p:spPr>
           <a:xfrm>
+            <a:off x="548640" y="1599133"/>
+            <a:ext cx="11094720" cy="1046073"/>
+          </a:xfrm>
+          <a:prstGeom prst="rect">
+            <a:avLst/>
+          </a:prstGeom>
+          <a:noFill/>
+        </p:spPr>
+        <p:txBody>
+          <a:bodyPr wrap="square" lIns="0" rIns="0" tIns="0" bIns="0" anchor="t">
+            <a:spAutoFit/>
+          </a:bodyPr>
+          <a:lstStyle/>
+          <a:p>
+            <a:pPr algn="l">
+              <a:lnSpc>
+                <a:spcPts val="4118"/>
+              </a:lnSpc>
+            </a:pPr>
+            <a:r>
+              <a:rPr sz="3120" b="1">
+                <a:solidFill>
+                  <a:srgbClr val="FFFFFF"/>
+                </a:solidFill>
+                <a:latin typeface="Microsoft JhengHei"/>
+                <a:ea typeface="Microsoft JhengHei"/>
+                <a:cs typeface="Microsoft JhengHei"/>
+              </a:rPr>
+              <a:t>先看課程總覽：</a:t>
+            </a:r>
+          </a:p>
+          <a:p>
+            <a:pPr algn="l">
+              <a:lnSpc>
+                <a:spcPts val="4118"/>
+              </a:lnSpc>
+            </a:pPr>
+            <a:r>
+              <a:rPr sz="3120" b="1">
+                <a:solidFill>
+                  <a:srgbClr val="FFFFFF"/>
+                </a:solidFill>
+                <a:latin typeface="Microsoft JhengHei"/>
+                <a:ea typeface="Microsoft JhengHei"/>
+                <a:cs typeface="Microsoft JhengHei"/>
+              </a:rPr>
+              <a:t>我們最後要交付什麼？</a:t>
+            </a:r>
+          </a:p>
+        </p:txBody>
+      </p:sp>
+      <p:sp>
+        <p:nvSpPr>
+          <p:cNvPr id="3" name="Rounded Rectangle 2"/>
+          <p:cNvSpPr/>
+          <p:nvPr/>
+        </p:nvSpPr>
+        <p:spPr>
+          <a:xfrm>
+            <a:off x="548640" y="2767126"/>
+            <a:ext cx="731520" cy="53340"/>
+          </a:xfrm>
+          <a:prstGeom prst="roundRect">
+            <a:avLst>
+              <a:gd name="adj" fmla="val 50000"/>
+            </a:avLst>
+          </a:prstGeom>
+          <a:solidFill>
+            <a:srgbClr val="7CB8FF"/>
+          </a:solidFill>
+          <a:ln>
+            <a:noFill/>
+          </a:ln>
+          <a:effectLst/>
+        </p:spPr>
+        <p:style>
+          <a:lnRef idx="1">
+            <a:schemeClr val="accent1"/>
+          </a:lnRef>
+          <a:fillRef idx="3">
+            <a:schemeClr val="accent1"/>
+          </a:fillRef>
+          <a:effectRef idx="2">
+            <a:schemeClr val="accent1"/>
+          </a:effectRef>
+          <a:fontRef idx="minor">
+            <a:schemeClr val="lt1"/>
+          </a:fontRef>
+        </p:style>
+        <p:txBody>
+          <a:bodyPr rtlCol="0" anchor="ctr"/>
+          <a:lstStyle/>
+          <a:p/>
+        </p:txBody>
+      </p:sp>
+      <p:graphicFrame>
+        <p:nvGraphicFramePr>
+          <p:cNvPr id="4" name="Table 3"/>
+          <p:cNvGraphicFramePr>
+            <a:graphicFrameLocks noGrp="1"/>
+          </p:cNvGraphicFramePr>
+          <p:nvPr/>
+        </p:nvGraphicFramePr>
+        <p:xfrm>
+          <a:off x="548640" y="3033826"/>
+          <a:ext cx="11094719" cy="2072640"/>
+        </p:xfrm>
+        <a:graphic>
+          <a:graphicData uri="http://schemas.openxmlformats.org/drawingml/2006/table">
+            <a:tbl>
+              <a:tblPr>
+                <a:tableStyleId>{5C22544A-7EE6-4342-B048-85BDC9FD1C3A}</a:tableStyleId>
+              </a:tblPr>
+              <a:tblGrid>
+                <a:gridCol w="2440838"/>
+                <a:gridCol w="8653881"/>
+              </a:tblGrid>
+              <a:tr h="414528">
+                <a:tc>
+                  <a:txBody>
+                    <a:bodyPr wrap="square"/>
+                    <a:lstStyle/>
+                    <a:p>
+                      <a:pPr>
+                        <a:lnSpc>
+                          <a:spcPts val="1823"/>
+                        </a:lnSpc>
+                      </a:pPr>
+                      <a:r>
+                        <a:rPr sz="1140" b="1">
+                          <a:solidFill>
+                            <a:srgbClr val="FFFFFF"/>
+                          </a:solidFill>
+                          <a:latin typeface="Microsoft JhengHei"/>
+                          <a:ea typeface="Microsoft JhengHei"/>
+                          <a:cs typeface="Microsoft JhengHei"/>
+                        </a:rPr>
+                        <a:t>課程地圖</a:t>
+                      </a:r>
+                    </a:p>
+                  </a:txBody>
+                  <a:tcPr marL="121920" marR="121920" marT="91440" marB="91440" anchor="t">
+                    <a:solidFill>
+                      <a:srgbClr val="1B2542"/>
+                    </a:solidFill>
+                  </a:tcPr>
+                </a:tc>
+                <a:tc>
+                  <a:txBody>
+                    <a:bodyPr wrap="square"/>
+                    <a:lstStyle/>
+                    <a:p>
+                      <a:pPr>
+                        <a:lnSpc>
+                          <a:spcPts val="1823"/>
+                        </a:lnSpc>
+                      </a:pPr>
+                      <a:r>
+                        <a:rPr sz="1140" b="1">
+                          <a:solidFill>
+                            <a:srgbClr val="FFFFFF"/>
+                          </a:solidFill>
+                          <a:latin typeface="Microsoft JhengHei"/>
+                          <a:ea typeface="Microsoft JhengHei"/>
+                          <a:cs typeface="Microsoft JhengHei"/>
+                        </a:rPr>
+                        <a:t>內容</a:t>
+                      </a:r>
+                    </a:p>
+                  </a:txBody>
+                  <a:tcPr marL="121920" marR="121920" marT="91440" marB="91440" anchor="t">
+                    <a:solidFill>
+                      <a:srgbClr val="1B2542"/>
+                    </a:solidFill>
+                  </a:tcPr>
+                </a:tc>
+              </a:tr>
+              <a:tr h="414528">
+                <a:tc>
+                  <a:txBody>
+                    <a:bodyPr wrap="square"/>
+                    <a:lstStyle/>
+                    <a:p>
+                      <a:pPr>
+                        <a:lnSpc>
+                          <a:spcPts val="1823"/>
+                        </a:lnSpc>
+                      </a:pPr>
+                      <a:r>
+                        <a:rPr sz="1140" b="0">
+                          <a:solidFill>
+                            <a:srgbClr val="F4F7FF"/>
+                          </a:solidFill>
+                          <a:latin typeface="Microsoft JhengHei"/>
+                          <a:ea typeface="Microsoft JhengHei"/>
+                          <a:cs typeface="Microsoft JhengHei"/>
+                        </a:rPr>
+                        <a:t>規模</a:t>
+                      </a:r>
+                    </a:p>
+                  </a:txBody>
+                  <a:tcPr marL="121920" marR="121920" marT="91440" marB="91440" anchor="t">
+                    <a:solidFill>
+                      <a:srgbClr val="05070F"/>
+                    </a:solidFill>
+                  </a:tcPr>
+                </a:tc>
+                <a:tc>
+                  <a:txBody>
+                    <a:bodyPr wrap="square"/>
+                    <a:lstStyle/>
+                    <a:p>
+                      <a:pPr>
+                        <a:lnSpc>
+                          <a:spcPts val="1823"/>
+                        </a:lnSpc>
+                      </a:pPr>
+                      <a:r>
+                        <a:rPr sz="1140" b="0">
+                          <a:solidFill>
+                            <a:srgbClr val="F4F7FF"/>
+                          </a:solidFill>
+                          <a:latin typeface="Microsoft JhengHei"/>
+                          <a:ea typeface="Microsoft JhengHei"/>
+                          <a:cs typeface="Microsoft JhengHei"/>
+                        </a:rPr>
+                        <a:t>32 小時／四天混成學習：先打穩 Spring Boot、REST、JPA、Flyway、Security、React</a:t>
+                      </a:r>
+                    </a:p>
+                  </a:txBody>
+                  <a:tcPr marL="121920" marR="121920" marT="91440" marB="91440" anchor="t">
+                    <a:solidFill>
+                      <a:srgbClr val="05070F"/>
+                    </a:solidFill>
+                  </a:tcPr>
+                </a:tc>
+              </a:tr>
+              <a:tr h="414528">
+                <a:tc>
+                  <a:txBody>
+                    <a:bodyPr wrap="square"/>
+                    <a:lstStyle/>
+                    <a:p>
+                      <a:pPr>
+                        <a:lnSpc>
+                          <a:spcPts val="1823"/>
+                        </a:lnSpc>
+                      </a:pPr>
+                      <a:r>
+                        <a:rPr sz="1140" b="0">
+                          <a:solidFill>
+                            <a:srgbClr val="F4F7FF"/>
+                          </a:solidFill>
+                          <a:latin typeface="Microsoft JhengHei"/>
+                          <a:ea typeface="Microsoft JhengHei"/>
+                          <a:cs typeface="Microsoft JhengHei"/>
+                        </a:rPr>
+                        <a:t>後半段</a:t>
+                      </a:r>
+                    </a:p>
+                  </a:txBody>
+                  <a:tcPr marL="121920" marR="121920" marT="91440" marB="91440" anchor="t">
+                    <a:solidFill>
+                      <a:srgbClr val="05070F"/>
+                    </a:solidFill>
+                  </a:tcPr>
+                </a:tc>
+                <a:tc>
+                  <a:txBody>
+                    <a:bodyPr wrap="square"/>
+                    <a:lstStyle/>
+                    <a:p>
+                      <a:pPr>
+                        <a:lnSpc>
+                          <a:spcPts val="1823"/>
+                        </a:lnSpc>
+                      </a:pPr>
+                      <a:r>
+                        <a:rPr sz="1140" b="0">
+                          <a:solidFill>
+                            <a:srgbClr val="F4F7FF"/>
+                          </a:solidFill>
+                          <a:latin typeface="Microsoft JhengHei"/>
+                          <a:ea typeface="Microsoft JhengHei"/>
+                          <a:cs typeface="Microsoft JhengHei"/>
+                        </a:rPr>
+                        <a:t>把 Spring AI、SSE、tool calling、RAG、MCP 接回同一個 CRM domain</a:t>
+                      </a:r>
+                    </a:p>
+                  </a:txBody>
+                  <a:tcPr marL="121920" marR="121920" marT="91440" marB="91440" anchor="t">
+                    <a:solidFill>
+                      <a:srgbClr val="05070F"/>
+                    </a:solidFill>
+                  </a:tcPr>
+                </a:tc>
+              </a:tr>
+              <a:tr h="414528">
+                <a:tc>
+                  <a:txBody>
+                    <a:bodyPr wrap="square"/>
+                    <a:lstStyle/>
+                    <a:p>
+                      <a:pPr>
+                        <a:lnSpc>
+                          <a:spcPts val="1823"/>
+                        </a:lnSpc>
+                      </a:pPr>
+                      <a:r>
+                        <a:rPr sz="1140" b="0">
+                          <a:solidFill>
+                            <a:srgbClr val="F4F7FF"/>
+                          </a:solidFill>
+                          <a:latin typeface="Microsoft JhengHei"/>
+                          <a:ea typeface="Microsoft JhengHei"/>
+                          <a:cs typeface="Microsoft JhengHei"/>
+                        </a:rPr>
+                        <a:t>核心產出</a:t>
+                      </a:r>
+                    </a:p>
+                  </a:txBody>
+                  <a:tcPr marL="121920" marR="121920" marT="91440" marB="91440" anchor="t">
+                    <a:solidFill>
+                      <a:srgbClr val="05070F"/>
+                    </a:solidFill>
+                  </a:tcPr>
+                </a:tc>
+                <a:tc>
+                  <a:txBody>
+                    <a:bodyPr wrap="square"/>
+                    <a:lstStyle/>
+                    <a:p>
+                      <a:pPr>
+                        <a:lnSpc>
+                          <a:spcPts val="1823"/>
+                        </a:lnSpc>
+                      </a:pPr>
+                      <a:r>
+                        <a:rPr sz="1140" b="0">
+                          <a:solidFill>
+                            <a:srgbClr val="F4F7FF"/>
+                          </a:solidFill>
+                          <a:latin typeface="Microsoft JhengHei"/>
+                          <a:ea typeface="Microsoft JhengHei"/>
+                          <a:cs typeface="Microsoft JhengHei"/>
+                        </a:rPr>
+                        <a:t>AI CRM 智慧業務助理：登入、客戶管理、AI 對話、RAG 知識庫、agent trace</a:t>
+                      </a:r>
+                    </a:p>
+                  </a:txBody>
+                  <a:tcPr marL="121920" marR="121920" marT="91440" marB="91440" anchor="t">
+                    <a:solidFill>
+                      <a:srgbClr val="05070F"/>
+                    </a:solidFill>
+                  </a:tcPr>
+                </a:tc>
+              </a:tr>
+              <a:tr h="414528">
+                <a:tc>
+                  <a:txBody>
+                    <a:bodyPr wrap="square"/>
+                    <a:lstStyle/>
+                    <a:p>
+                      <a:pPr>
+                        <a:lnSpc>
+                          <a:spcPts val="1823"/>
+                        </a:lnSpc>
+                      </a:pPr>
+                      <a:r>
+                        <a:rPr sz="1140" b="0">
+                          <a:solidFill>
+                            <a:srgbClr val="F4F7FF"/>
+                          </a:solidFill>
+                          <a:latin typeface="Microsoft JhengHei"/>
+                          <a:ea typeface="Microsoft JhengHei"/>
+                          <a:cs typeface="Microsoft JhengHei"/>
+                        </a:rPr>
+                        <a:t>完成標準</a:t>
+                      </a:r>
+                    </a:p>
+                  </a:txBody>
+                  <a:tcPr marL="121920" marR="121920" marT="91440" marB="91440" anchor="t">
+                    <a:solidFill>
+                      <a:srgbClr val="05070F"/>
+                    </a:solidFill>
+                  </a:tcPr>
+                </a:tc>
+                <a:tc>
+                  <a:txBody>
+                    <a:bodyPr wrap="square"/>
+                    <a:lstStyle/>
+                    <a:p>
+                      <a:pPr>
+                        <a:lnSpc>
+                          <a:spcPts val="1823"/>
+                        </a:lnSpc>
+                      </a:pPr>
+                      <a:r>
+                        <a:rPr sz="1140" b="0">
+                          <a:solidFill>
+                            <a:srgbClr val="F4F7FF"/>
+                          </a:solidFill>
+                          <a:latin typeface="Microsoft JhengHei"/>
+                          <a:ea typeface="Microsoft JhengHei"/>
+                          <a:cs typeface="Microsoft JhengHei"/>
+                        </a:rPr>
+                        <a:t>本機 verify 通過、完成結訓測驗，並在 Demo Day 展示完整流程</a:t>
+                      </a:r>
+                    </a:p>
+                  </a:txBody>
+                  <a:tcPr marL="121920" marR="121920" marT="91440" marB="91440" anchor="t">
+                    <a:solidFill>
+                      <a:srgbClr val="05070F"/>
+                    </a:solidFill>
+                  </a:tcPr>
+                </a:tc>
+              </a:tr>
+            </a:tbl>
+          </a:graphicData>
+        </a:graphic>
+      </p:graphicFrame>
+      <p:sp>
+        <p:nvSpPr>
+          <p:cNvPr id="5" name="Rectangle 4"/>
+          <p:cNvSpPr/>
+          <p:nvPr/>
+        </p:nvSpPr>
+        <p:spPr>
+          <a:xfrm>
+            <a:off x="0" y="6507480"/>
+            <a:ext cx="12192000" cy="350520"/>
+          </a:xfrm>
+          <a:prstGeom prst="rect">
+            <a:avLst/>
+          </a:prstGeom>
+          <a:solidFill>
+            <a:srgbClr val="060A16"/>
+          </a:solidFill>
+          <a:ln>
+            <a:noFill/>
+          </a:ln>
+          <a:effectLst/>
+        </p:spPr>
+        <p:style>
+          <a:lnRef idx="1">
+            <a:schemeClr val="accent1"/>
+          </a:lnRef>
+          <a:fillRef idx="3">
+            <a:schemeClr val="accent1"/>
+          </a:fillRef>
+          <a:effectRef idx="2">
+            <a:schemeClr val="accent1"/>
+          </a:effectRef>
+          <a:fontRef idx="minor">
+            <a:schemeClr val="lt1"/>
+          </a:fontRef>
+        </p:style>
+        <p:txBody>
+          <a:bodyPr rtlCol="0" anchor="ctr"/>
+          <a:lstStyle/>
+          <a:p/>
+        </p:txBody>
+      </p:sp>
+      <p:sp>
+        <p:nvSpPr>
+          <p:cNvPr id="6" name="TextBox 5"/>
+          <p:cNvSpPr txBox="1"/>
+          <p:nvPr/>
+        </p:nvSpPr>
+        <p:spPr>
+          <a:xfrm>
+            <a:off x="182880" y="6606540"/>
+            <a:ext cx="3048000" cy="167640"/>
+          </a:xfrm>
+          <a:prstGeom prst="rect">
+            <a:avLst/>
+          </a:prstGeom>
+          <a:noFill/>
+        </p:spPr>
+        <p:txBody>
+          <a:bodyPr wrap="square" lIns="0" rIns="0" tIns="0" bIns="0" anchor="t">
+            <a:spAutoFit/>
+          </a:bodyPr>
+          <a:lstStyle/>
+          <a:p>
+            <a:pPr algn="l">
+              <a:lnSpc>
+                <a:spcPts val="1008"/>
+              </a:lnSpc>
+            </a:pPr>
+            <a:r>
+              <a:rPr sz="840" b="0">
+                <a:solidFill>
+                  <a:srgbClr val="7CB8FF"/>
+                </a:solidFill>
+                <a:latin typeface="Microsoft JhengHei"/>
+                <a:ea typeface="Microsoft JhengHei"/>
+                <a:cs typeface="Microsoft JhengHei"/>
+              </a:rPr>
+              <a:t>課程總覽</a:t>
+            </a:r>
+          </a:p>
+        </p:txBody>
+      </p:sp>
+      <p:sp>
+        <p:nvSpPr>
+          <p:cNvPr id="7" name="TextBox 6"/>
+          <p:cNvSpPr txBox="1"/>
+          <p:nvPr/>
+        </p:nvSpPr>
+        <p:spPr>
+          <a:xfrm>
+            <a:off x="8961120" y="6606540"/>
+            <a:ext cx="3048000" cy="167640"/>
+          </a:xfrm>
+          <a:prstGeom prst="rect">
+            <a:avLst/>
+          </a:prstGeom>
+          <a:noFill/>
+        </p:spPr>
+        <p:txBody>
+          <a:bodyPr wrap="square" lIns="0" rIns="0" tIns="0" bIns="0" anchor="t">
+            <a:spAutoFit/>
+          </a:bodyPr>
+          <a:lstStyle/>
+          <a:p>
+            <a:pPr algn="l">
+              <a:lnSpc>
+                <a:spcPts val="1008"/>
+              </a:lnSpc>
+            </a:pPr>
+            <a:r>
+              <a:rPr sz="840" b="0">
+                <a:solidFill>
+                  <a:srgbClr val="AEBFE0"/>
+                </a:solidFill>
+                <a:latin typeface="Microsoft JhengHei"/>
+                <a:ea typeface="Microsoft JhengHei"/>
+                <a:cs typeface="Microsoft JhengHei"/>
+              </a:rPr>
+              <a:t>2 / 12</a:t>
+            </a:r>
+          </a:p>
+        </p:txBody>
+      </p:sp>
+    </p:spTree>
+  </p:cSld>
+  <p:clrMapOvr>
+    <a:masterClrMapping/>
+  </p:clrMapOvr>
+</p:sld>
+</file>
+
+<file path=ppt/slides/slide3.xml><?xml version="1.0" encoding="utf-8"?>
+<p:sld xmlns:a="http://schemas.openxmlformats.org/drawingml/2006/main" xmlns:p="http://schemas.openxmlformats.org/presentationml/2006/main" xmlns:r="http://schemas.openxmlformats.org/officeDocument/2006/relationships">
+  <p:cSld>
+    <p:bg>
+      <p:bgPr>
+        <a:solidFill>
+          <a:srgbClr val="05070F"/>
+        </a:solidFill>
+        <a:effectLst/>
+      </p:bgPr>
+    </p:bg>
+    <p:spTree>
+      <p:nvGrpSpPr>
+        <p:cNvPr id="1" name=""/>
+        <p:cNvGrpSpPr/>
+        <p:nvPr/>
+      </p:nvGrpSpPr>
+      <p:grpSpPr/>
+      <p:sp>
+        <p:nvSpPr>
+          <p:cNvPr id="2" name="TextBox 1"/>
+          <p:cNvSpPr txBox="1"/>
+          <p:nvPr/>
+        </p:nvSpPr>
+        <p:spPr>
+          <a:xfrm>
+            <a:off x="548640" y="1379296"/>
+            <a:ext cx="11094720" cy="1046073"/>
+          </a:xfrm>
+          <a:prstGeom prst="rect">
+            <a:avLst/>
+          </a:prstGeom>
+          <a:noFill/>
+        </p:spPr>
+        <p:txBody>
+          <a:bodyPr wrap="square" lIns="0" rIns="0" tIns="0" bIns="0" anchor="t">
+            <a:spAutoFit/>
+          </a:bodyPr>
+          <a:lstStyle/>
+          <a:p>
+            <a:pPr algn="l">
+              <a:lnSpc>
+                <a:spcPts val="4118"/>
+              </a:lnSpc>
+            </a:pPr>
+            <a:r>
+              <a:rPr sz="3120" b="1">
+                <a:solidFill>
+                  <a:srgbClr val="FFFFFF"/>
+                </a:solidFill>
+                <a:latin typeface="Microsoft JhengHei"/>
+                <a:ea typeface="Microsoft JhengHei"/>
+                <a:cs typeface="Microsoft JhengHei"/>
+              </a:rPr>
+              <a:t>先理解共同情境：</a:t>
+            </a:r>
+          </a:p>
+          <a:p>
+            <a:pPr algn="l">
+              <a:lnSpc>
+                <a:spcPts val="4118"/>
+              </a:lnSpc>
+            </a:pPr>
+            <a:r>
+              <a:rPr sz="3120" b="1">
+                <a:solidFill>
+                  <a:srgbClr val="FFFFFF"/>
+                </a:solidFill>
+                <a:latin typeface="Microsoft JhengHei"/>
+                <a:ea typeface="Microsoft JhengHei"/>
+                <a:cs typeface="Microsoft JhengHei"/>
+              </a:rPr>
+              <a:t>三家 B2B 客戶，三種決策問題</a:t>
+            </a:r>
+          </a:p>
+        </p:txBody>
+      </p:sp>
+      <p:sp>
+        <p:nvSpPr>
+          <p:cNvPr id="3" name="Rounded Rectangle 2"/>
+          <p:cNvSpPr/>
+          <p:nvPr/>
+        </p:nvSpPr>
+        <p:spPr>
+          <a:xfrm>
+            <a:off x="548640" y="2547289"/>
+            <a:ext cx="731520" cy="53340"/>
+          </a:xfrm>
+          <a:prstGeom prst="roundRect">
+            <a:avLst>
+              <a:gd name="adj" fmla="val 50000"/>
+            </a:avLst>
+          </a:prstGeom>
+          <a:solidFill>
+            <a:srgbClr val="7CB8FF"/>
+          </a:solidFill>
+          <a:ln>
+            <a:noFill/>
+          </a:ln>
+          <a:effectLst/>
+        </p:spPr>
+        <p:style>
+          <a:lnRef idx="1">
+            <a:schemeClr val="accent1"/>
+          </a:lnRef>
+          <a:fillRef idx="3">
+            <a:schemeClr val="accent1"/>
+          </a:fillRef>
+          <a:effectRef idx="2">
+            <a:schemeClr val="accent1"/>
+          </a:effectRef>
+          <a:fontRef idx="minor">
+            <a:schemeClr val="lt1"/>
+          </a:fontRef>
+        </p:style>
+        <p:txBody>
+          <a:bodyPr rtlCol="0" anchor="ctr"/>
+          <a:lstStyle/>
+          <a:p/>
+        </p:txBody>
+      </p:sp>
+      <p:graphicFrame>
+        <p:nvGraphicFramePr>
+          <p:cNvPr id="4" name="Table 3"/>
+          <p:cNvGraphicFramePr>
+            <a:graphicFrameLocks noGrp="1"/>
+          </p:cNvGraphicFramePr>
+          <p:nvPr/>
+        </p:nvGraphicFramePr>
+        <p:xfrm>
+          <a:off x="548640" y="2813989"/>
+          <a:ext cx="11094720" cy="1889760"/>
+        </p:xfrm>
+        <a:graphic>
+          <a:graphicData uri="http://schemas.openxmlformats.org/drawingml/2006/table">
+            <a:tbl>
+              <a:tblPr>
+                <a:tableStyleId>{5C22544A-7EE6-4342-B048-85BDC9FD1C3A}</a:tableStyleId>
+              </a:tblPr>
+              <a:tblGrid>
+                <a:gridCol w="2773680"/>
+                <a:gridCol w="2773680"/>
+                <a:gridCol w="5547360"/>
+              </a:tblGrid>
+              <a:tr h="414528">
+                <a:tc>
+                  <a:txBody>
+                    <a:bodyPr wrap="square"/>
+                    <a:lstStyle/>
+                    <a:p>
+                      <a:pPr>
+                        <a:lnSpc>
+                          <a:spcPts val="1823"/>
+                        </a:lnSpc>
+                      </a:pPr>
+                      <a:r>
+                        <a:rPr sz="1140" b="1">
+                          <a:solidFill>
+                            <a:srgbClr val="FFFFFF"/>
+                          </a:solidFill>
+                          <a:latin typeface="Microsoft JhengHei"/>
+                          <a:ea typeface="Microsoft JhengHei"/>
+                          <a:cs typeface="Microsoft JhengHei"/>
+                        </a:rPr>
+                        <a:t>客戶</a:t>
+                      </a:r>
+                    </a:p>
+                  </a:txBody>
+                  <a:tcPr marL="121920" marR="121920" marT="91440" marB="91440" anchor="t">
+                    <a:solidFill>
+                      <a:srgbClr val="1B2542"/>
+                    </a:solidFill>
+                  </a:tcPr>
+                </a:tc>
+                <a:tc>
+                  <a:txBody>
+                    <a:bodyPr wrap="square"/>
+                    <a:lstStyle/>
+                    <a:p>
+                      <a:pPr>
+                        <a:lnSpc>
+                          <a:spcPts val="1823"/>
+                        </a:lnSpc>
+                      </a:pPr>
+                      <a:r>
+                        <a:rPr sz="1140" b="1">
+                          <a:solidFill>
+                            <a:srgbClr val="FFFFFF"/>
+                          </a:solidFill>
+                          <a:latin typeface="Microsoft JhengHei"/>
+                          <a:ea typeface="Microsoft JhengHei"/>
+                          <a:cs typeface="Microsoft JhengHei"/>
+                        </a:rPr>
+                        <a:t>目前狀態</a:t>
+                      </a:r>
+                    </a:p>
+                  </a:txBody>
+                  <a:tcPr marL="121920" marR="121920" marT="91440" marB="91440" anchor="t">
+                    <a:solidFill>
+                      <a:srgbClr val="1B2542"/>
+                    </a:solidFill>
+                  </a:tcPr>
+                </a:tc>
+                <a:tc>
+                  <a:txBody>
+                    <a:bodyPr wrap="square"/>
+                    <a:lstStyle/>
+                    <a:p>
+                      <a:pPr>
+                        <a:lnSpc>
+                          <a:spcPts val="1823"/>
+                        </a:lnSpc>
+                      </a:pPr>
+                      <a:r>
+                        <a:rPr sz="1140" b="1">
+                          <a:solidFill>
+                            <a:srgbClr val="FFFFFF"/>
+                          </a:solidFill>
+                          <a:latin typeface="Microsoft JhengHei"/>
+                          <a:ea typeface="Microsoft JhengHei"/>
+                          <a:cs typeface="Microsoft JhengHei"/>
+                        </a:rPr>
+                        <a:t>CRM 要協助回答的問題</a:t>
+                      </a:r>
+                    </a:p>
+                  </a:txBody>
+                  <a:tcPr marL="121920" marR="121920" marT="91440" marB="91440" anchor="t">
+                    <a:solidFill>
+                      <a:srgbClr val="1B2542"/>
+                    </a:solidFill>
+                  </a:tcPr>
+                </a:tc>
+              </a:tr>
+              <a:tr h="414528">
+                <a:tc>
+                  <a:txBody>
+                    <a:bodyPr wrap="square"/>
+                    <a:lstStyle/>
+                    <a:p>
+                      <a:pPr>
+                        <a:lnSpc>
+                          <a:spcPts val="1823"/>
+                        </a:lnSpc>
+                      </a:pPr>
+                      <a:r>
+                        <a:rPr sz="1140" b="0">
+                          <a:solidFill>
+                            <a:srgbClr val="F4F7FF"/>
+                          </a:solidFill>
+                          <a:latin typeface="Microsoft JhengHei"/>
+                          <a:ea typeface="Microsoft JhengHei"/>
+                          <a:cs typeface="Microsoft JhengHei"/>
+                        </a:rPr>
+                        <a:t>亞太智能製造
+(APIM)</a:t>
+                      </a:r>
+                    </a:p>
+                  </a:txBody>
+                  <a:tcPr marL="121920" marR="121920" marT="91440" marB="91440" anchor="t">
+                    <a:solidFill>
+                      <a:srgbClr val="05070F"/>
+                    </a:solidFill>
+                  </a:tcPr>
+                </a:tc>
+                <a:tc>
+                  <a:txBody>
+                    <a:bodyPr wrap="square"/>
+                    <a:lstStyle/>
+                    <a:p>
+                      <a:pPr>
+                        <a:lnSpc>
+                          <a:spcPts val="1823"/>
+                        </a:lnSpc>
+                      </a:pPr>
+                      <a:r>
+                        <a:rPr sz="1140" b="0">
+                          <a:solidFill>
+                            <a:srgbClr val="F4F7FF"/>
+                          </a:solidFill>
+                          <a:latin typeface="Microsoft JhengHei"/>
+                          <a:ea typeface="Microsoft JhengHei"/>
+                          <a:cs typeface="Microsoft JhengHei"/>
+                        </a:rPr>
+                        <a:t>高價值活躍客戶
+有 AI 預測維護商機</a:t>
+                      </a:r>
+                    </a:p>
+                  </a:txBody>
+                  <a:tcPr marL="121920" marR="121920" marT="91440" marB="91440" anchor="t">
+                    <a:solidFill>
+                      <a:srgbClr val="05070F"/>
+                    </a:solidFill>
+                  </a:tcPr>
+                </a:tc>
+                <a:tc>
+                  <a:txBody>
+                    <a:bodyPr wrap="square"/>
+                    <a:lstStyle/>
+                    <a:p>
+                      <a:pPr>
+                        <a:lnSpc>
+                          <a:spcPts val="1823"/>
+                        </a:lnSpc>
+                      </a:pPr>
+                      <a:r>
+                        <a:rPr sz="1140" b="0">
+                          <a:solidFill>
+                            <a:srgbClr val="F4F7FF"/>
+                          </a:solidFill>
+                          <a:latin typeface="Microsoft JhengHei"/>
+                          <a:ea typeface="Microsoft JhengHei"/>
+                          <a:cs typeface="Microsoft JhengHei"/>
+                        </a:rPr>
+                        <a:t>如何掌握活躍客戶的商機與下一步行動？</a:t>
+                      </a:r>
+                    </a:p>
+                  </a:txBody>
+                  <a:tcPr marL="121920" marR="121920" marT="91440" marB="91440" anchor="t">
+                    <a:solidFill>
+                      <a:srgbClr val="05070F"/>
+                    </a:solidFill>
+                  </a:tcPr>
+                </a:tc>
+              </a:tr>
+              <a:tr h="646176">
+                <a:tc>
+                  <a:txBody>
+                    <a:bodyPr wrap="square"/>
+                    <a:lstStyle/>
+                    <a:p>
+                      <a:pPr>
+                        <a:lnSpc>
+                          <a:spcPts val="1823"/>
+                        </a:lnSpc>
+                      </a:pPr>
+                      <a:r>
+                        <a:rPr sz="1140" b="0">
+                          <a:solidFill>
+                            <a:srgbClr val="F4F7FF"/>
+                          </a:solidFill>
+                          <a:latin typeface="Microsoft JhengHei"/>
+                          <a:ea typeface="Microsoft JhengHei"/>
+                          <a:cs typeface="Microsoft JhengHei"/>
+                        </a:rPr>
+                        <a:t>環球零售巨擘
+(GlobalMart)</a:t>
+                      </a:r>
+                    </a:p>
+                  </a:txBody>
+                  <a:tcPr marL="121920" marR="121920" marT="91440" marB="91440" anchor="t">
+                    <a:solidFill>
+                      <a:srgbClr val="05070F"/>
+                    </a:solidFill>
+                  </a:tcPr>
+                </a:tc>
+                <a:tc>
+                  <a:txBody>
+                    <a:bodyPr wrap="square"/>
+                    <a:lstStyle/>
+                    <a:p>
+                      <a:pPr>
+                        <a:lnSpc>
+                          <a:spcPts val="1823"/>
+                        </a:lnSpc>
+                      </a:pPr>
+                      <a:r>
+                        <a:rPr sz="1140" b="0">
+                          <a:solidFill>
+                            <a:srgbClr val="F4F7FF"/>
+                          </a:solidFill>
+                          <a:latin typeface="Microsoft JhengHei"/>
+                          <a:ea typeface="Microsoft JhengHei"/>
+                          <a:cs typeface="Microsoft JhengHei"/>
+                        </a:rPr>
+                        <a:t>流失風險客戶
+合約將到期、有未解決客訴</a:t>
+                      </a:r>
+                    </a:p>
+                  </a:txBody>
+                  <a:tcPr marL="121920" marR="121920" marT="91440" marB="91440" anchor="t">
+                    <a:solidFill>
+                      <a:srgbClr val="05070F"/>
+                    </a:solidFill>
+                  </a:tcPr>
+                </a:tc>
+                <a:tc>
+                  <a:txBody>
+                    <a:bodyPr wrap="square"/>
+                    <a:lstStyle/>
+                    <a:p>
+                      <a:pPr>
+                        <a:lnSpc>
+                          <a:spcPts val="1823"/>
+                        </a:lnSpc>
+                      </a:pPr>
+                      <a:r>
+                        <a:rPr sz="1140" b="0">
+                          <a:solidFill>
+                            <a:srgbClr val="F4F7FF"/>
+                          </a:solidFill>
+                          <a:latin typeface="Microsoft JhengHei"/>
+                          <a:ea typeface="Microsoft JhengHei"/>
+                          <a:cs typeface="Microsoft JhengHei"/>
+                        </a:rPr>
+                        <a:t>如何從互動紀錄判斷風險並提出挽回建議？</a:t>
+                      </a:r>
+                    </a:p>
+                  </a:txBody>
+                  <a:tcPr marL="121920" marR="121920" marT="91440" marB="91440" anchor="t">
+                    <a:solidFill>
+                      <a:srgbClr val="05070F"/>
+                    </a:solidFill>
+                  </a:tcPr>
+                </a:tc>
+              </a:tr>
+              <a:tr h="414528">
+                <a:tc>
+                  <a:txBody>
+                    <a:bodyPr wrap="square"/>
+                    <a:lstStyle/>
+                    <a:p>
+                      <a:pPr>
+                        <a:lnSpc>
+                          <a:spcPts val="1823"/>
+                        </a:lnSpc>
+                      </a:pPr>
+                      <a:r>
+                        <a:rPr sz="1140" b="0">
+                          <a:solidFill>
+                            <a:srgbClr val="F4F7FF"/>
+                          </a:solidFill>
+                          <a:latin typeface="Microsoft JhengHei"/>
+                          <a:ea typeface="Microsoft JhengHei"/>
+                          <a:cs typeface="Microsoft JhengHei"/>
+                        </a:rPr>
+                        <a:t>鼎峰金融科技
+(ApexFin)</a:t>
+                      </a:r>
+                    </a:p>
+                  </a:txBody>
+                  <a:tcPr marL="121920" marR="121920" marT="91440" marB="91440" anchor="t">
+                    <a:solidFill>
+                      <a:srgbClr val="05070F"/>
+                    </a:solidFill>
+                  </a:tcPr>
+                </a:tc>
+                <a:tc>
+                  <a:txBody>
+                    <a:bodyPr wrap="square"/>
+                    <a:lstStyle/>
+                    <a:p>
+                      <a:pPr>
+                        <a:lnSpc>
+                          <a:spcPts val="1823"/>
+                        </a:lnSpc>
+                      </a:pPr>
+                      <a:r>
+                        <a:rPr sz="1140" b="0">
+                          <a:solidFill>
+                            <a:srgbClr val="F4F7FF"/>
+                          </a:solidFill>
+                          <a:latin typeface="Microsoft JhengHei"/>
+                          <a:ea typeface="Microsoft JhengHei"/>
+                          <a:cs typeface="Microsoft JhengHei"/>
+                        </a:rPr>
+                        <a:t>續約延遲客戶
+合約已過期、商機停滯</a:t>
+                      </a:r>
+                    </a:p>
+                  </a:txBody>
+                  <a:tcPr marL="121920" marR="121920" marT="91440" marB="91440" anchor="t">
+                    <a:solidFill>
+                      <a:srgbClr val="05070F"/>
+                    </a:solidFill>
+                  </a:tcPr>
+                </a:tc>
+                <a:tc>
+                  <a:txBody>
+                    <a:bodyPr wrap="square"/>
+                    <a:lstStyle/>
+                    <a:p>
+                      <a:pPr>
+                        <a:lnSpc>
+                          <a:spcPts val="1823"/>
+                        </a:lnSpc>
+                      </a:pPr>
+                      <a:r>
+                        <a:rPr sz="1140" b="0">
+                          <a:solidFill>
+                            <a:srgbClr val="F4F7FF"/>
+                          </a:solidFill>
+                          <a:latin typeface="Microsoft JhengHei"/>
+                          <a:ea typeface="Microsoft JhengHei"/>
+                          <a:cs typeface="Microsoft JhengHei"/>
+                        </a:rPr>
+                        <a:t>如何找出停滯原因，做出有資料支撐的決策？</a:t>
+                      </a:r>
+                    </a:p>
+                  </a:txBody>
+                  <a:tcPr marL="121920" marR="121920" marT="91440" marB="91440" anchor="t">
+                    <a:solidFill>
+                      <a:srgbClr val="05070F"/>
+                    </a:solidFill>
+                  </a:tcPr>
+                </a:tc>
+              </a:tr>
+            </a:tbl>
+          </a:graphicData>
+        </a:graphic>
+      </p:graphicFrame>
+      <p:sp>
+        <p:nvSpPr>
+          <p:cNvPr id="5" name="Rounded Rectangle 4"/>
+          <p:cNvSpPr/>
+          <p:nvPr/>
+        </p:nvSpPr>
+        <p:spPr>
+          <a:xfrm>
+            <a:off x="548640" y="4886629"/>
+            <a:ext cx="11094720" cy="439674"/>
+          </a:xfrm>
+          <a:prstGeom prst="roundRect">
+            <a:avLst>
+              <a:gd name="adj" fmla="val 17331"/>
+            </a:avLst>
+          </a:prstGeom>
+          <a:solidFill>
+            <a:srgbClr val="101A36"/>
+          </a:solidFill>
+          <a:ln w="12700">
+            <a:solidFill>
+              <a:srgbClr val="2C3A63"/>
+            </a:solidFill>
+          </a:ln>
+          <a:effectLst/>
+        </p:spPr>
+        <p:style>
+          <a:lnRef idx="1">
+            <a:schemeClr val="accent1"/>
+          </a:lnRef>
+          <a:fillRef idx="3">
+            <a:schemeClr val="accent1"/>
+          </a:fillRef>
+          <a:effectRef idx="2">
+            <a:schemeClr val="accent1"/>
+          </a:effectRef>
+          <a:fontRef idx="minor">
+            <a:schemeClr val="lt1"/>
+          </a:fontRef>
+        </p:style>
+        <p:txBody>
+          <a:bodyPr rtlCol="0" anchor="ctr"/>
+          <a:lstStyle/>
+          <a:p/>
+        </p:txBody>
+      </p:sp>
+      <p:sp>
+        <p:nvSpPr>
+          <p:cNvPr id="6" name="Rectangle 5"/>
+          <p:cNvSpPr/>
+          <p:nvPr/>
+        </p:nvSpPr>
+        <p:spPr>
+          <a:xfrm>
+            <a:off x="548640" y="4886629"/>
+            <a:ext cx="38100" cy="439674"/>
+          </a:xfrm>
+          <a:prstGeom prst="rect">
+            <a:avLst/>
+          </a:prstGeom>
+          <a:solidFill>
+            <a:srgbClr val="7CB8FF"/>
+          </a:solidFill>
+          <a:ln>
+            <a:noFill/>
+          </a:ln>
+          <a:effectLst/>
+        </p:spPr>
+        <p:style>
+          <a:lnRef idx="1">
+            <a:schemeClr val="accent1"/>
+          </a:lnRef>
+          <a:fillRef idx="3">
+            <a:schemeClr val="accent1"/>
+          </a:fillRef>
+          <a:effectRef idx="2">
+            <a:schemeClr val="accent1"/>
+          </a:effectRef>
+          <a:fontRef idx="minor">
+            <a:schemeClr val="lt1"/>
+          </a:fontRef>
+        </p:style>
+        <p:txBody>
+          <a:bodyPr rtlCol="0" anchor="ctr"/>
+          <a:lstStyle/>
+          <a:p/>
+        </p:txBody>
+      </p:sp>
+      <p:sp>
+        <p:nvSpPr>
+          <p:cNvPr id="7" name="TextBox 6"/>
+          <p:cNvSpPr txBox="1"/>
+          <p:nvPr/>
+        </p:nvSpPr>
+        <p:spPr>
+          <a:xfrm>
+            <a:off x="739140" y="4993309"/>
+            <a:ext cx="10713720" cy="226314"/>
+          </a:xfrm>
+          <a:prstGeom prst="rect">
+            <a:avLst/>
+          </a:prstGeom>
+          <a:noFill/>
+        </p:spPr>
+        <p:txBody>
+          <a:bodyPr wrap="square" lIns="0" rIns="0" tIns="0" bIns="0" anchor="ctr">
+            <a:spAutoFit/>
+          </a:bodyPr>
+          <a:lstStyle/>
+          <a:p>
+            <a:pPr algn="l">
+              <a:lnSpc>
+                <a:spcPts val="1782"/>
+              </a:lnSpc>
+            </a:pPr>
+            <a:r>
+              <a:rPr sz="1080" b="1">
+                <a:solidFill>
+                  <a:srgbClr val="7CB8FF"/>
+                </a:solidFill>
+                <a:latin typeface="Microsoft JhengHei"/>
+                <a:ea typeface="Microsoft JhengHei"/>
+                <a:cs typeface="Microsoft JhengHei"/>
+              </a:rPr>
+              <a:t>共同邊界：</a:t>
+            </a:r>
+            <a:r>
+              <a:rPr sz="1080" b="0">
+                <a:solidFill>
+                  <a:srgbClr val="AEBFE0"/>
+                </a:solidFill>
+                <a:latin typeface="Microsoft JhengHei"/>
+                <a:ea typeface="Microsoft JhengHei"/>
+                <a:cs typeface="Microsoft JhengHei"/>
+              </a:rPr>
+              <a:t>數字由程式算，摘要、風險與行動建議由 AI 撰寫。</a:t>
+            </a:r>
+          </a:p>
+        </p:txBody>
+      </p:sp>
+      <p:sp>
+        <p:nvSpPr>
+          <p:cNvPr id="8" name="Rectangle 7"/>
+          <p:cNvSpPr/>
+          <p:nvPr/>
+        </p:nvSpPr>
+        <p:spPr>
+          <a:xfrm>
+            <a:off x="0" y="6507480"/>
+            <a:ext cx="12192000" cy="350520"/>
+          </a:xfrm>
+          <a:prstGeom prst="rect">
+            <a:avLst/>
+          </a:prstGeom>
+          <a:solidFill>
+            <a:srgbClr val="060A16"/>
+          </a:solidFill>
+          <a:ln>
+            <a:noFill/>
+          </a:ln>
+          <a:effectLst/>
+        </p:spPr>
+        <p:style>
+          <a:lnRef idx="1">
+            <a:schemeClr val="accent1"/>
+          </a:lnRef>
+          <a:fillRef idx="3">
+            <a:schemeClr val="accent1"/>
+          </a:fillRef>
+          <a:effectRef idx="2">
+            <a:schemeClr val="accent1"/>
+          </a:effectRef>
+          <a:fontRef idx="minor">
+            <a:schemeClr val="lt1"/>
+          </a:fontRef>
+        </p:style>
+        <p:txBody>
+          <a:bodyPr rtlCol="0" anchor="ctr"/>
+          <a:lstStyle/>
+          <a:p/>
+        </p:txBody>
+      </p:sp>
+      <p:sp>
+        <p:nvSpPr>
+          <p:cNvPr id="9" name="TextBox 8"/>
+          <p:cNvSpPr txBox="1"/>
+          <p:nvPr/>
+        </p:nvSpPr>
+        <p:spPr>
+          <a:xfrm>
+            <a:off x="182880" y="6606540"/>
+            <a:ext cx="3048000" cy="167640"/>
+          </a:xfrm>
+          <a:prstGeom prst="rect">
+            <a:avLst/>
+          </a:prstGeom>
+          <a:noFill/>
+        </p:spPr>
+        <p:txBody>
+          <a:bodyPr wrap="square" lIns="0" rIns="0" tIns="0" bIns="0" anchor="t">
+            <a:spAutoFit/>
+          </a:bodyPr>
+          <a:lstStyle/>
+          <a:p>
+            <a:pPr algn="l">
+              <a:lnSpc>
+                <a:spcPts val="1008"/>
+              </a:lnSpc>
+            </a:pPr>
+            <a:r>
+              <a:rPr sz="840" b="0">
+                <a:solidFill>
+                  <a:srgbClr val="7CB8FF"/>
+                </a:solidFill>
+                <a:latin typeface="Microsoft JhengHei"/>
+                <a:ea typeface="Microsoft JhengHei"/>
+                <a:cs typeface="Microsoft JhengHei"/>
+              </a:rPr>
+              <a:t>共用情境</a:t>
+            </a:r>
+          </a:p>
+        </p:txBody>
+      </p:sp>
+      <p:sp>
+        <p:nvSpPr>
+          <p:cNvPr id="10" name="TextBox 9"/>
+          <p:cNvSpPr txBox="1"/>
+          <p:nvPr/>
+        </p:nvSpPr>
+        <p:spPr>
+          <a:xfrm>
+            <a:off x="8961120" y="6606540"/>
+            <a:ext cx="3048000" cy="167640"/>
+          </a:xfrm>
+          <a:prstGeom prst="rect">
+            <a:avLst/>
+          </a:prstGeom>
+          <a:noFill/>
+        </p:spPr>
+        <p:txBody>
+          <a:bodyPr wrap="square" lIns="0" rIns="0" tIns="0" bIns="0" anchor="t">
+            <a:spAutoFit/>
+          </a:bodyPr>
+          <a:lstStyle/>
+          <a:p>
+            <a:pPr algn="l">
+              <a:lnSpc>
+                <a:spcPts val="1008"/>
+              </a:lnSpc>
+            </a:pPr>
+            <a:r>
+              <a:rPr sz="840" b="0">
+                <a:solidFill>
+                  <a:srgbClr val="AEBFE0"/>
+                </a:solidFill>
+                <a:latin typeface="Microsoft JhengHei"/>
+                <a:ea typeface="Microsoft JhengHei"/>
+                <a:cs typeface="Microsoft JhengHei"/>
+              </a:rPr>
+              <a:t>3 / 12</a:t>
+            </a:r>
+          </a:p>
+        </p:txBody>
+      </p:sp>
+    </p:spTree>
+  </p:cSld>
+  <p:clrMapOvr>
+    <a:masterClrMapping/>
+  </p:clrMapOvr>
+</p:sld>
+</file>
+
+<file path=ppt/slides/slide4.xml><?xml version="1.0" encoding="utf-8"?>
+<p:sld xmlns:a="http://schemas.openxmlformats.org/drawingml/2006/main" xmlns:p="http://schemas.openxmlformats.org/presentationml/2006/main" xmlns:r="http://schemas.openxmlformats.org/officeDocument/2006/relationships">
+  <p:cSld>
+    <p:bg>
+      <p:bgPr>
+        <a:solidFill>
+          <a:srgbClr val="05070F"/>
+        </a:solidFill>
+        <a:effectLst/>
+      </p:bgPr>
+    </p:bg>
+    <p:spTree>
+      <p:nvGrpSpPr>
+        <p:cNvPr id="1" name=""/>
+        <p:cNvGrpSpPr/>
+        <p:nvPr/>
+      </p:nvGrpSpPr>
+      <p:grpSpPr/>
+      <p:sp>
+        <p:nvSpPr>
+          <p:cNvPr id="2" name="TextBox 1"/>
+          <p:cNvSpPr txBox="1"/>
+          <p:nvPr/>
+        </p:nvSpPr>
+        <p:spPr>
+          <a:xfrm>
             <a:off x="548640" y="1154277"/>
             <a:ext cx="11094720" cy="523036"/>
           </a:xfrm>
@@ -5604,7 +8656,7 @@
                 <a:ea typeface="Microsoft JhengHei"/>
                 <a:cs typeface="Microsoft JhengHei"/>
               </a:rPr>
-              <a:t>2 / 10</a:t>
+              <a:t>4 / 12</a:t>
             </a:r>
           </a:p>
         </p:txBody>
@@ -5617,7 +8669,7 @@
 </p:sld>
 </file>
 
-<file path=ppt/slides/slide3.xml><?xml version="1.0" encoding="utf-8"?>
+<file path=ppt/slides/slide5.xml><?xml version="1.0" encoding="utf-8"?>
 <p:sld xmlns:a="http://schemas.openxmlformats.org/drawingml/2006/main" xmlns:p="http://schemas.openxmlformats.org/presentationml/2006/main" xmlns:r="http://schemas.openxmlformats.org/officeDocument/2006/relationships">
   <p:cSld>
     <p:bg>
@@ -6273,7 +9325,7 @@
                 <a:ea typeface="Microsoft JhengHei"/>
                 <a:cs typeface="Microsoft JhengHei"/>
               </a:rPr>
-              <a:t>3 / 10</a:t>
+              <a:t>5 / 12</a:t>
             </a:r>
           </a:p>
         </p:txBody>
@@ -6286,7 +9338,7 @@
 </p:sld>
 </file>
 
-<file path=ppt/slides/slide4.xml><?xml version="1.0" encoding="utf-8"?>
+<file path=ppt/slides/slide6.xml><?xml version="1.0" encoding="utf-8"?>
 <p:sld xmlns:a="http://schemas.openxmlformats.org/drawingml/2006/main" xmlns:p="http://schemas.openxmlformats.org/presentationml/2006/main" xmlns:r="http://schemas.openxmlformats.org/officeDocument/2006/relationships">
   <p:cSld>
     <p:bg>
@@ -6607,7 +9659,7 @@
                 <a:ea typeface="Microsoft JhengHei"/>
                 <a:cs typeface="Microsoft JhengHei"/>
               </a:rPr>
-              <a:t>4 / 10</a:t>
+              <a:t>6 / 12</a:t>
             </a:r>
           </a:p>
         </p:txBody>
@@ -6620,7 +9672,7 @@
 </p:sld>
 </file>
 
-<file path=ppt/slides/slide5.xml><?xml version="1.0" encoding="utf-8"?>
+<file path=ppt/slides/slide7.xml><?xml version="1.0" encoding="utf-8"?>
 <p:sld xmlns:a="http://schemas.openxmlformats.org/drawingml/2006/main" xmlns:p="http://schemas.openxmlformats.org/presentationml/2006/main" xmlns:r="http://schemas.openxmlformats.org/officeDocument/2006/relationships">
   <p:cSld>
     <p:bg>
@@ -7330,7 +10382,7 @@
                 <a:ea typeface="Microsoft JhengHei"/>
                 <a:cs typeface="Microsoft JhengHei"/>
               </a:rPr>
-              <a:t>5 / 10</a:t>
+              <a:t>7 / 12</a:t>
             </a:r>
           </a:p>
         </p:txBody>
@@ -7343,7 +10395,7 @@
 </p:sld>
 </file>
 
-<file path=ppt/slides/slide6.xml><?xml version="1.0" encoding="utf-8"?>
+<file path=ppt/slides/slide8.xml><?xml version="1.0" encoding="utf-8"?>
 <p:sld xmlns:a="http://schemas.openxmlformats.org/drawingml/2006/main" xmlns:p="http://schemas.openxmlformats.org/presentationml/2006/main" xmlns:r="http://schemas.openxmlformats.org/officeDocument/2006/relationships">
   <p:cSld>
     <p:bg>
@@ -7951,1474 +11003,7 @@
                 <a:ea typeface="Microsoft JhengHei"/>
                 <a:cs typeface="Microsoft JhengHei"/>
               </a:rPr>
-              <a:t>6 / 10</a:t>
-            </a:r>
-          </a:p>
-        </p:txBody>
-      </p:sp>
-    </p:spTree>
-  </p:cSld>
-  <p:clrMapOvr>
-    <a:masterClrMapping/>
-  </p:clrMapOvr>
-</p:sld>
-</file>
-
-<file path=ppt/slides/slide7.xml><?xml version="1.0" encoding="utf-8"?>
-<p:sld xmlns:a="http://schemas.openxmlformats.org/drawingml/2006/main" xmlns:p="http://schemas.openxmlformats.org/presentationml/2006/main" xmlns:r="http://schemas.openxmlformats.org/officeDocument/2006/relationships">
-  <p:cSld>
-    <p:bg>
-      <p:bgPr>
-        <a:solidFill>
-          <a:srgbClr val="05070F"/>
-        </a:solidFill>
-        <a:effectLst/>
-      </p:bgPr>
-    </p:bg>
-    <p:spTree>
-      <p:nvGrpSpPr>
-        <p:cNvPr id="1" name=""/>
-        <p:cNvGrpSpPr/>
-        <p:nvPr/>
-      </p:nvGrpSpPr>
-      <p:grpSpPr/>
-      <p:sp>
-        <p:nvSpPr>
-          <p:cNvPr id="2" name="TextBox 1"/>
-          <p:cNvSpPr txBox="1"/>
-          <p:nvPr/>
-        </p:nvSpPr>
-        <p:spPr>
-          <a:xfrm>
-            <a:off x="548640" y="1476222"/>
-            <a:ext cx="11094720" cy="523036"/>
-          </a:xfrm>
-          <a:prstGeom prst="rect">
-            <a:avLst/>
-          </a:prstGeom>
-          <a:noFill/>
-        </p:spPr>
-        <p:txBody>
-          <a:bodyPr wrap="square" lIns="0" rIns="0" tIns="0" bIns="0" anchor="t">
-            <a:spAutoFit/>
-          </a:bodyPr>
-          <a:lstStyle/>
-          <a:p>
-            <a:pPr algn="l">
-              <a:lnSpc>
-                <a:spcPts val="4118"/>
-              </a:lnSpc>
-            </a:pPr>
-            <a:r>
-              <a:rPr sz="3120" b="1">
-                <a:solidFill>
-                  <a:srgbClr val="FFFFFF"/>
-                </a:solidFill>
-                <a:latin typeface="Microsoft JhengHei"/>
-                <a:ea typeface="Microsoft JhengHei"/>
-                <a:cs typeface="Microsoft JhengHei"/>
-              </a:rPr>
-              <a:t>除了單元頁面，還有</a:t>
-            </a:r>
-          </a:p>
-        </p:txBody>
-      </p:sp>
-      <p:sp>
-        <p:nvSpPr>
-          <p:cNvPr id="3" name="Rounded Rectangle 2"/>
-          <p:cNvSpPr/>
-          <p:nvPr/>
-        </p:nvSpPr>
-        <p:spPr>
-          <a:xfrm>
-            <a:off x="548640" y="2121179"/>
-            <a:ext cx="731520" cy="53340"/>
-          </a:xfrm>
-          <a:prstGeom prst="roundRect">
-            <a:avLst>
-              <a:gd name="adj" fmla="val 50000"/>
-            </a:avLst>
-          </a:prstGeom>
-          <a:solidFill>
-            <a:srgbClr val="7CB8FF"/>
-          </a:solidFill>
-          <a:ln>
-            <a:noFill/>
-          </a:ln>
-          <a:effectLst/>
-        </p:spPr>
-        <p:style>
-          <a:lnRef idx="1">
-            <a:schemeClr val="accent1"/>
-          </a:lnRef>
-          <a:fillRef idx="3">
-            <a:schemeClr val="accent1"/>
-          </a:fillRef>
-          <a:effectRef idx="2">
-            <a:schemeClr val="accent1"/>
-          </a:effectRef>
-          <a:fontRef idx="minor">
-            <a:schemeClr val="lt1"/>
-          </a:fontRef>
-        </p:style>
-        <p:txBody>
-          <a:bodyPr rtlCol="0" anchor="ctr"/>
-          <a:lstStyle/>
-          <a:p/>
-        </p:txBody>
-      </p:sp>
-      <p:sp>
-        <p:nvSpPr>
-          <p:cNvPr id="4" name="TextBox 3"/>
-          <p:cNvSpPr txBox="1"/>
-          <p:nvPr/>
-        </p:nvSpPr>
-        <p:spPr>
-          <a:xfrm>
-            <a:off x="548640" y="2387879"/>
-            <a:ext cx="11094720" cy="298703"/>
-          </a:xfrm>
-          <a:prstGeom prst="rect">
-            <a:avLst/>
-          </a:prstGeom>
-          <a:noFill/>
-        </p:spPr>
-        <p:txBody>
-          <a:bodyPr wrap="square" lIns="0" rIns="0" tIns="0" bIns="0" anchor="t">
-            <a:spAutoFit/>
-          </a:bodyPr>
-          <a:lstStyle/>
-          <a:p>
-            <a:pPr algn="l">
-              <a:lnSpc>
-                <a:spcPts val="2352"/>
-              </a:lnSpc>
-            </a:pPr>
-            <a:r>
-              <a:rPr sz="1680" b="1">
-                <a:solidFill>
-                  <a:srgbClr val="7CB8FF"/>
-                </a:solidFill>
-                <a:latin typeface="Microsoft JhengHei"/>
-                <a:ea typeface="Microsoft JhengHei"/>
-                <a:cs typeface="Microsoft JhengHei"/>
-              </a:rPr>
-              <a:t>七份下載教材</a:t>
-            </a:r>
-          </a:p>
-        </p:txBody>
-      </p:sp>
-      <p:sp>
-        <p:nvSpPr>
-          <p:cNvPr id="5" name="TextBox 4"/>
-          <p:cNvSpPr txBox="1"/>
-          <p:nvPr/>
-        </p:nvSpPr>
-        <p:spPr>
-          <a:xfrm>
-            <a:off x="548640" y="2793263"/>
-            <a:ext cx="11094720" cy="544068"/>
-          </a:xfrm>
-          <a:prstGeom prst="rect">
-            <a:avLst/>
-          </a:prstGeom>
-          <a:noFill/>
-        </p:spPr>
-        <p:txBody>
-          <a:bodyPr wrap="square" lIns="0" rIns="0" tIns="0" bIns="0" anchor="t">
-            <a:spAutoFit/>
-          </a:bodyPr>
-          <a:lstStyle/>
-          <a:p>
-            <a:pPr algn="l">
-              <a:lnSpc>
-                <a:spcPts val="2142"/>
-              </a:lnSpc>
-            </a:pPr>
-            <a:r>
-              <a:rPr sz="1260" b="0">
-                <a:solidFill>
-                  <a:srgbClr val="F4F7FF"/>
-                </a:solidFill>
-                <a:latin typeface="Microsoft JhengHei"/>
-                <a:ea typeface="Microsoft JhengHei"/>
-                <a:cs typeface="Microsoft JhengHei"/>
-              </a:rPr>
-              <a:t>開發環境安裝指引 · REST API 命名規範 · Docker PostgreSQL 與 pgvector 設定 · pgvector 向量檢索指令 · JWT 架構與認證流程 · React 與 Axios 前後端整合 · Spring AI 與 Tool Calling 架構</a:t>
-            </a:r>
-          </a:p>
-        </p:txBody>
-      </p:sp>
-      <p:sp>
-        <p:nvSpPr>
-          <p:cNvPr id="6" name="TextBox 5"/>
-          <p:cNvSpPr txBox="1"/>
-          <p:nvPr/>
-        </p:nvSpPr>
-        <p:spPr>
-          <a:xfrm>
-            <a:off x="548640" y="3444011"/>
-            <a:ext cx="11094720" cy="298703"/>
-          </a:xfrm>
-          <a:prstGeom prst="rect">
-            <a:avLst/>
-          </a:prstGeom>
-          <a:noFill/>
-        </p:spPr>
-        <p:txBody>
-          <a:bodyPr wrap="square" lIns="0" rIns="0" tIns="0" bIns="0" anchor="t">
-            <a:spAutoFit/>
-          </a:bodyPr>
-          <a:lstStyle/>
-          <a:p>
-            <a:pPr algn="l">
-              <a:lnSpc>
-                <a:spcPts val="2352"/>
-              </a:lnSpc>
-            </a:pPr>
-            <a:r>
-              <a:rPr sz="1680" b="1">
-                <a:solidFill>
-                  <a:srgbClr val="7CB8FF"/>
-                </a:solidFill>
-                <a:latin typeface="Microsoft JhengHei"/>
-                <a:ea typeface="Microsoft JhengHei"/>
-                <a:cs typeface="Microsoft JhengHei"/>
-              </a:rPr>
-              <a:t>還有</a:t>
-            </a:r>
-          </a:p>
-        </p:txBody>
-      </p:sp>
-      <p:sp>
-        <p:nvSpPr>
-          <p:cNvPr id="7" name="TextBox 6"/>
-          <p:cNvSpPr txBox="1"/>
-          <p:nvPr/>
-        </p:nvSpPr>
-        <p:spPr>
-          <a:xfrm>
-            <a:off x="548640" y="3849395"/>
-            <a:ext cx="11094720" cy="272034"/>
-          </a:xfrm>
-          <a:prstGeom prst="rect">
-            <a:avLst/>
-          </a:prstGeom>
-          <a:noFill/>
-        </p:spPr>
-        <p:txBody>
-          <a:bodyPr wrap="square" lIns="0" rIns="0" tIns="0" bIns="0" anchor="t">
-            <a:spAutoFit/>
-          </a:bodyPr>
-          <a:lstStyle/>
-          <a:p>
-            <a:pPr algn="l">
-              <a:lnSpc>
-                <a:spcPts val="2142"/>
-              </a:lnSpc>
-            </a:pPr>
-            <a:r>
-              <a:rPr sz="1260" b="1">
-                <a:solidFill>
-                  <a:srgbClr val="F4F7FF"/>
-                </a:solidFill>
-                <a:latin typeface="Microsoft JhengHei"/>
-                <a:ea typeface="Microsoft JhengHei"/>
-                <a:cs typeface="Microsoft JhengHei"/>
-              </a:rPr>
-              <a:t>隨堂測驗</a:t>
-            </a:r>
-            <a:r>
-              <a:rPr sz="1260" b="0">
-                <a:solidFill>
-                  <a:srgbClr val="F4F7FF"/>
-                </a:solidFill>
-                <a:latin typeface="Microsoft JhengHei"/>
-                <a:ea typeface="Microsoft JhengHei"/>
-                <a:cs typeface="Microsoft JhengHei"/>
-              </a:rPr>
-              <a:t>——檢查自己是否真的理解</a:t>
-            </a:r>
-          </a:p>
-        </p:txBody>
-      </p:sp>
-      <p:sp>
-        <p:nvSpPr>
-          <p:cNvPr id="8" name="TextBox 7"/>
-          <p:cNvSpPr txBox="1"/>
-          <p:nvPr/>
-        </p:nvSpPr>
-        <p:spPr>
-          <a:xfrm>
-            <a:off x="548640" y="4228109"/>
-            <a:ext cx="11094720" cy="272034"/>
-          </a:xfrm>
-          <a:prstGeom prst="rect">
-            <a:avLst/>
-          </a:prstGeom>
-          <a:noFill/>
-        </p:spPr>
-        <p:txBody>
-          <a:bodyPr wrap="square" lIns="0" rIns="0" tIns="0" bIns="0" anchor="t">
-            <a:spAutoFit/>
-          </a:bodyPr>
-          <a:lstStyle/>
-          <a:p>
-            <a:pPr algn="l">
-              <a:lnSpc>
-                <a:spcPts val="2142"/>
-              </a:lnSpc>
-            </a:pPr>
-            <a:r>
-              <a:rPr sz="1260" b="1">
-                <a:solidFill>
-                  <a:srgbClr val="F4F7FF"/>
-                </a:solidFill>
-                <a:latin typeface="Microsoft JhengHei"/>
-                <a:ea typeface="Microsoft JhengHei"/>
-                <a:cs typeface="Microsoft JhengHei"/>
-              </a:rPr>
-              <a:t>附錄</a:t>
-            </a:r>
-            <a:r>
-              <a:rPr sz="1260" b="0">
-                <a:solidFill>
-                  <a:srgbClr val="F4F7FF"/>
-                </a:solidFill>
-                <a:latin typeface="Microsoft JhengHei"/>
-                <a:ea typeface="Microsoft JhengHei"/>
-                <a:cs typeface="Microsoft JhengHei"/>
-              </a:rPr>
-              <a:t>——術語表、常見問題、驗收檢核清單</a:t>
-            </a:r>
-          </a:p>
-        </p:txBody>
-      </p:sp>
-      <p:sp>
-        <p:nvSpPr>
-          <p:cNvPr id="9" name="Rounded Rectangle 8"/>
-          <p:cNvSpPr/>
-          <p:nvPr/>
-        </p:nvSpPr>
-        <p:spPr>
-          <a:xfrm>
-            <a:off x="548640" y="4789703"/>
-            <a:ext cx="11094720" cy="439674"/>
-          </a:xfrm>
-          <a:prstGeom prst="roundRect">
-            <a:avLst>
-              <a:gd name="adj" fmla="val 17331"/>
-            </a:avLst>
-          </a:prstGeom>
-          <a:solidFill>
-            <a:srgbClr val="101A36"/>
-          </a:solidFill>
-          <a:ln w="12700">
-            <a:solidFill>
-              <a:srgbClr val="2C3A63"/>
-            </a:solidFill>
-          </a:ln>
-          <a:effectLst/>
-        </p:spPr>
-        <p:style>
-          <a:lnRef idx="1">
-            <a:schemeClr val="accent1"/>
-          </a:lnRef>
-          <a:fillRef idx="3">
-            <a:schemeClr val="accent1"/>
-          </a:fillRef>
-          <a:effectRef idx="2">
-            <a:schemeClr val="accent1"/>
-          </a:effectRef>
-          <a:fontRef idx="minor">
-            <a:schemeClr val="lt1"/>
-          </a:fontRef>
-        </p:style>
-        <p:txBody>
-          <a:bodyPr rtlCol="0" anchor="ctr"/>
-          <a:lstStyle/>
-          <a:p/>
-        </p:txBody>
-      </p:sp>
-      <p:sp>
-        <p:nvSpPr>
-          <p:cNvPr id="10" name="Rectangle 9"/>
-          <p:cNvSpPr/>
-          <p:nvPr/>
-        </p:nvSpPr>
-        <p:spPr>
-          <a:xfrm>
-            <a:off x="548640" y="4789703"/>
-            <a:ext cx="38100" cy="439674"/>
-          </a:xfrm>
-          <a:prstGeom prst="rect">
-            <a:avLst/>
-          </a:prstGeom>
-          <a:solidFill>
-            <a:srgbClr val="7CB8FF"/>
-          </a:solidFill>
-          <a:ln>
-            <a:noFill/>
-          </a:ln>
-          <a:effectLst/>
-        </p:spPr>
-        <p:style>
-          <a:lnRef idx="1">
-            <a:schemeClr val="accent1"/>
-          </a:lnRef>
-          <a:fillRef idx="3">
-            <a:schemeClr val="accent1"/>
-          </a:fillRef>
-          <a:effectRef idx="2">
-            <a:schemeClr val="accent1"/>
-          </a:effectRef>
-          <a:fontRef idx="minor">
-            <a:schemeClr val="lt1"/>
-          </a:fontRef>
-        </p:style>
-        <p:txBody>
-          <a:bodyPr rtlCol="0" anchor="ctr"/>
-          <a:lstStyle/>
-          <a:p/>
-        </p:txBody>
-      </p:sp>
-      <p:sp>
-        <p:nvSpPr>
-          <p:cNvPr id="11" name="TextBox 10"/>
-          <p:cNvSpPr txBox="1"/>
-          <p:nvPr/>
-        </p:nvSpPr>
-        <p:spPr>
-          <a:xfrm>
-            <a:off x="739140" y="4896383"/>
-            <a:ext cx="10713720" cy="226314"/>
-          </a:xfrm>
-          <a:prstGeom prst="rect">
-            <a:avLst/>
-          </a:prstGeom>
-          <a:noFill/>
-        </p:spPr>
-        <p:txBody>
-          <a:bodyPr wrap="square" lIns="0" rIns="0" tIns="0" bIns="0" anchor="ctr">
-            <a:spAutoFit/>
-          </a:bodyPr>
-          <a:lstStyle/>
-          <a:p>
-            <a:pPr algn="l">
-              <a:lnSpc>
-                <a:spcPts val="1782"/>
-              </a:lnSpc>
-            </a:pPr>
-            <a:r>
-              <a:rPr sz="1080" b="0">
-                <a:solidFill>
-                  <a:srgbClr val="AEBFE0"/>
-                </a:solidFill>
-                <a:latin typeface="Microsoft JhengHei"/>
-                <a:ea typeface="Microsoft JhengHei"/>
-                <a:cs typeface="Microsoft JhengHei"/>
-              </a:rPr>
-              <a:t>教學網站：</a:t>
-            </a:r>
-            <a:r>
-              <a:rPr sz="1080" b="1">
-                <a:solidFill>
-                  <a:srgbClr val="7CB8FF"/>
-                </a:solidFill>
-                <a:latin typeface="Microsoft JhengHei"/>
-                <a:ea typeface="Microsoft JhengHei"/>
-                <a:cs typeface="Microsoft JhengHei"/>
-              </a:rPr>
-              <a:t>https://kevintsai1202.github.io/ai-full-stack/</a:t>
-            </a:r>
-          </a:p>
-        </p:txBody>
-      </p:sp>
-      <p:sp>
-        <p:nvSpPr>
-          <p:cNvPr id="12" name="Rectangle 11"/>
-          <p:cNvSpPr/>
-          <p:nvPr/>
-        </p:nvSpPr>
-        <p:spPr>
-          <a:xfrm>
-            <a:off x="0" y="6507480"/>
-            <a:ext cx="12192000" cy="350520"/>
-          </a:xfrm>
-          <a:prstGeom prst="rect">
-            <a:avLst/>
-          </a:prstGeom>
-          <a:solidFill>
-            <a:srgbClr val="060A16"/>
-          </a:solidFill>
-          <a:ln>
-            <a:noFill/>
-          </a:ln>
-          <a:effectLst/>
-        </p:spPr>
-        <p:style>
-          <a:lnRef idx="1">
-            <a:schemeClr val="accent1"/>
-          </a:lnRef>
-          <a:fillRef idx="3">
-            <a:schemeClr val="accent1"/>
-          </a:fillRef>
-          <a:effectRef idx="2">
-            <a:schemeClr val="accent1"/>
-          </a:effectRef>
-          <a:fontRef idx="minor">
-            <a:schemeClr val="lt1"/>
-          </a:fontRef>
-        </p:style>
-        <p:txBody>
-          <a:bodyPr rtlCol="0" anchor="ctr"/>
-          <a:lstStyle/>
-          <a:p/>
-        </p:txBody>
-      </p:sp>
-      <p:sp>
-        <p:nvSpPr>
-          <p:cNvPr id="13" name="TextBox 12"/>
-          <p:cNvSpPr txBox="1"/>
-          <p:nvPr/>
-        </p:nvSpPr>
-        <p:spPr>
-          <a:xfrm>
-            <a:off x="182880" y="6606540"/>
-            <a:ext cx="3048000" cy="167640"/>
-          </a:xfrm>
-          <a:prstGeom prst="rect">
-            <a:avLst/>
-          </a:prstGeom>
-          <a:noFill/>
-        </p:spPr>
-        <p:txBody>
-          <a:bodyPr wrap="square" lIns="0" rIns="0" tIns="0" bIns="0" anchor="t">
-            <a:spAutoFit/>
-          </a:bodyPr>
-          <a:lstStyle/>
-          <a:p>
-            <a:pPr algn="l">
-              <a:lnSpc>
-                <a:spcPts val="1008"/>
-              </a:lnSpc>
-            </a:pPr>
-            <a:r>
-              <a:rPr sz="840" b="0">
-                <a:solidFill>
-                  <a:srgbClr val="7CB8FF"/>
-                </a:solidFill>
-                <a:latin typeface="Microsoft JhengHei"/>
-                <a:ea typeface="Microsoft JhengHei"/>
-                <a:cs typeface="Microsoft JhengHei"/>
-              </a:rPr>
-              <a:t>網站</a:t>
-            </a:r>
-          </a:p>
-        </p:txBody>
-      </p:sp>
-      <p:sp>
-        <p:nvSpPr>
-          <p:cNvPr id="14" name="TextBox 13"/>
-          <p:cNvSpPr txBox="1"/>
-          <p:nvPr/>
-        </p:nvSpPr>
-        <p:spPr>
-          <a:xfrm>
-            <a:off x="8961120" y="6606540"/>
-            <a:ext cx="3048000" cy="167640"/>
-          </a:xfrm>
-          <a:prstGeom prst="rect">
-            <a:avLst/>
-          </a:prstGeom>
-          <a:noFill/>
-        </p:spPr>
-        <p:txBody>
-          <a:bodyPr wrap="square" lIns="0" rIns="0" tIns="0" bIns="0" anchor="t">
-            <a:spAutoFit/>
-          </a:bodyPr>
-          <a:lstStyle/>
-          <a:p>
-            <a:pPr algn="l">
-              <a:lnSpc>
-                <a:spcPts val="1008"/>
-              </a:lnSpc>
-            </a:pPr>
-            <a:r>
-              <a:rPr sz="840" b="0">
-                <a:solidFill>
-                  <a:srgbClr val="AEBFE0"/>
-                </a:solidFill>
-                <a:latin typeface="Microsoft JhengHei"/>
-                <a:ea typeface="Microsoft JhengHei"/>
-                <a:cs typeface="Microsoft JhengHei"/>
-              </a:rPr>
-              <a:t>7 / 10</a:t>
-            </a:r>
-          </a:p>
-        </p:txBody>
-      </p:sp>
-    </p:spTree>
-  </p:cSld>
-  <p:clrMapOvr>
-    <a:masterClrMapping/>
-  </p:clrMapOvr>
-</p:sld>
-</file>
-
-<file path=ppt/slides/slide8.xml><?xml version="1.0" encoding="utf-8"?>
-<p:sld xmlns:a="http://schemas.openxmlformats.org/drawingml/2006/main" xmlns:p="http://schemas.openxmlformats.org/presentationml/2006/main" xmlns:r="http://schemas.openxmlformats.org/officeDocument/2006/relationships">
-  <p:cSld>
-    <p:bg>
-      <p:bgPr>
-        <a:solidFill>
-          <a:srgbClr val="05070F"/>
-        </a:solidFill>
-        <a:effectLst/>
-      </p:bgPr>
-    </p:bg>
-    <p:spTree>
-      <p:nvGrpSpPr>
-        <p:cNvPr id="1" name=""/>
-        <p:cNvGrpSpPr/>
-        <p:nvPr/>
-      </p:nvGrpSpPr>
-      <p:grpSpPr/>
-      <p:sp>
-        <p:nvSpPr>
-          <p:cNvPr id="2" name="TextBox 1"/>
-          <p:cNvSpPr txBox="1"/>
-          <p:nvPr/>
-        </p:nvSpPr>
-        <p:spPr>
-          <a:xfrm>
-            <a:off x="548640" y="1966569"/>
-            <a:ext cx="11094720" cy="523036"/>
-          </a:xfrm>
-          <a:prstGeom prst="rect">
-            <a:avLst/>
-          </a:prstGeom>
-          <a:noFill/>
-        </p:spPr>
-        <p:txBody>
-          <a:bodyPr wrap="square" lIns="0" rIns="0" tIns="0" bIns="0" anchor="t">
-            <a:spAutoFit/>
-          </a:bodyPr>
-          <a:lstStyle/>
-          <a:p>
-            <a:pPr algn="l">
-              <a:lnSpc>
-                <a:spcPts val="4118"/>
-              </a:lnSpc>
-            </a:pPr>
-            <a:r>
-              <a:rPr sz="3120" b="1">
-                <a:solidFill>
-                  <a:srgbClr val="FFFFFF"/>
-                </a:solidFill>
-                <a:latin typeface="Microsoft JhengHei"/>
-                <a:ea typeface="Microsoft JhengHei"/>
-                <a:cs typeface="Microsoft JhengHei"/>
-              </a:rPr>
-              <a:t>影片可以無限次重複觀看</a:t>
-            </a:r>
-          </a:p>
-        </p:txBody>
-      </p:sp>
-      <p:sp>
-        <p:nvSpPr>
-          <p:cNvPr id="3" name="Rounded Rectangle 2"/>
-          <p:cNvSpPr/>
-          <p:nvPr/>
-        </p:nvSpPr>
-        <p:spPr>
-          <a:xfrm>
-            <a:off x="548640" y="2611526"/>
-            <a:ext cx="731520" cy="53340"/>
-          </a:xfrm>
-          <a:prstGeom prst="roundRect">
-            <a:avLst>
-              <a:gd name="adj" fmla="val 50000"/>
-            </a:avLst>
-          </a:prstGeom>
-          <a:solidFill>
-            <a:srgbClr val="7CB8FF"/>
-          </a:solidFill>
-          <a:ln>
-            <a:noFill/>
-          </a:ln>
-          <a:effectLst/>
-        </p:spPr>
-        <p:style>
-          <a:lnRef idx="1">
-            <a:schemeClr val="accent1"/>
-          </a:lnRef>
-          <a:fillRef idx="3">
-            <a:schemeClr val="accent1"/>
-          </a:fillRef>
-          <a:effectRef idx="2">
-            <a:schemeClr val="accent1"/>
-          </a:effectRef>
-          <a:fontRef idx="minor">
-            <a:schemeClr val="lt1"/>
-          </a:fontRef>
-        </p:style>
-        <p:txBody>
-          <a:bodyPr rtlCol="0" anchor="ctr"/>
-          <a:lstStyle/>
-          <a:p/>
-        </p:txBody>
-      </p:sp>
-      <p:sp>
-        <p:nvSpPr>
-          <p:cNvPr id="4" name="Rounded Rectangle 3"/>
-          <p:cNvSpPr/>
-          <p:nvPr/>
-        </p:nvSpPr>
-        <p:spPr>
-          <a:xfrm>
-            <a:off x="548640" y="3076346"/>
-            <a:ext cx="3444240" cy="1127760"/>
-          </a:xfrm>
-          <a:prstGeom prst="roundRect">
-            <a:avLst>
-              <a:gd name="adj" fmla="val 8108"/>
-            </a:avLst>
-          </a:prstGeom>
-          <a:solidFill>
-            <a:srgbClr val="1B2542"/>
-          </a:solidFill>
-          <a:ln w="12700">
-            <a:solidFill>
-              <a:srgbClr val="7CB8FF"/>
-            </a:solidFill>
-          </a:ln>
-          <a:effectLst/>
-        </p:spPr>
-        <p:style>
-          <a:lnRef idx="1">
-            <a:schemeClr val="accent1"/>
-          </a:lnRef>
-          <a:fillRef idx="3">
-            <a:schemeClr val="accent1"/>
-          </a:fillRef>
-          <a:effectRef idx="2">
-            <a:schemeClr val="accent1"/>
-          </a:effectRef>
-          <a:fontRef idx="minor">
-            <a:schemeClr val="lt1"/>
-          </a:fontRef>
-        </p:style>
-        <p:txBody>
-          <a:bodyPr rtlCol="0" anchor="ctr"/>
-          <a:lstStyle/>
-          <a:p/>
-        </p:txBody>
-      </p:sp>
-      <p:sp>
-        <p:nvSpPr>
-          <p:cNvPr id="5" name="TextBox 4"/>
-          <p:cNvSpPr txBox="1"/>
-          <p:nvPr/>
-        </p:nvSpPr>
-        <p:spPr>
-          <a:xfrm>
-            <a:off x="609600" y="3213506"/>
-            <a:ext cx="3322320" cy="152400"/>
-          </a:xfrm>
-          <a:prstGeom prst="rect">
-            <a:avLst/>
-          </a:prstGeom>
-          <a:noFill/>
-        </p:spPr>
-        <p:txBody>
-          <a:bodyPr wrap="square" lIns="0" rIns="0" tIns="0" bIns="0" anchor="t">
-            <a:spAutoFit/>
-          </a:bodyPr>
-          <a:lstStyle/>
-          <a:p>
-            <a:pPr algn="ctr">
-              <a:lnSpc>
-                <a:spcPts val="1176"/>
-              </a:lnSpc>
-            </a:pPr>
-            <a:r>
-              <a:rPr sz="840" b="0">
-                <a:solidFill>
-                  <a:srgbClr val="AEBFE0"/>
-                </a:solidFill>
-                <a:latin typeface="Microsoft JhengHei"/>
-                <a:ea typeface="Microsoft JhengHei"/>
-                <a:cs typeface="Microsoft JhengHei"/>
-              </a:rPr>
-              <a:t>第一遍</a:t>
-            </a:r>
-          </a:p>
-        </p:txBody>
-      </p:sp>
-      <p:sp>
-        <p:nvSpPr>
-          <p:cNvPr id="6" name="TextBox 5"/>
-          <p:cNvSpPr txBox="1"/>
-          <p:nvPr/>
-        </p:nvSpPr>
-        <p:spPr>
-          <a:xfrm>
-            <a:off x="609600" y="3396386"/>
-            <a:ext cx="3322320" cy="243840"/>
-          </a:xfrm>
-          <a:prstGeom prst="rect">
-            <a:avLst/>
-          </a:prstGeom>
-          <a:noFill/>
-        </p:spPr>
-        <p:txBody>
-          <a:bodyPr wrap="square" lIns="0" rIns="0" tIns="0" bIns="0" anchor="t">
-            <a:spAutoFit/>
-          </a:bodyPr>
-          <a:lstStyle/>
-          <a:p>
-            <a:pPr algn="ctr">
-              <a:lnSpc>
-                <a:spcPts val="1764"/>
-              </a:lnSpc>
-            </a:pPr>
-            <a:r>
-              <a:rPr sz="1260" b="1">
-                <a:solidFill>
-                  <a:srgbClr val="F4F7FF"/>
-                </a:solidFill>
-                <a:latin typeface="Microsoft JhengHei"/>
-                <a:ea typeface="Microsoft JhengHei"/>
-                <a:cs typeface="Microsoft JhengHei"/>
-              </a:rPr>
-              <a:t>純看不操作</a:t>
-            </a:r>
-          </a:p>
-        </p:txBody>
-      </p:sp>
-      <p:sp>
-        <p:nvSpPr>
-          <p:cNvPr id="7" name="TextBox 6"/>
-          <p:cNvSpPr txBox="1"/>
-          <p:nvPr/>
-        </p:nvSpPr>
-        <p:spPr>
-          <a:xfrm>
-            <a:off x="609600" y="3685946"/>
-            <a:ext cx="3322320" cy="381000"/>
-          </a:xfrm>
-          <a:prstGeom prst="rect">
-            <a:avLst/>
-          </a:prstGeom>
-          <a:noFill/>
-        </p:spPr>
-        <p:txBody>
-          <a:bodyPr wrap="square" lIns="0" rIns="0" tIns="0" bIns="0" anchor="t">
-            <a:spAutoFit/>
-          </a:bodyPr>
-          <a:lstStyle/>
-          <a:p>
-            <a:pPr algn="ctr">
-              <a:lnSpc>
-                <a:spcPts val="1395"/>
-              </a:lnSpc>
-            </a:pPr>
-            <a:r>
-              <a:rPr sz="900" b="0">
-                <a:solidFill>
-                  <a:srgbClr val="AEBFE0"/>
-                </a:solidFill>
-                <a:latin typeface="Microsoft JhengHei"/>
-                <a:ea typeface="Microsoft JhengHei"/>
-                <a:cs typeface="Microsoft JhengHei"/>
-              </a:rPr>
-              <a:t>先理解這一節在解決什麼問題</a:t>
-            </a:r>
-          </a:p>
-        </p:txBody>
-      </p:sp>
-      <p:sp>
-        <p:nvSpPr>
-          <p:cNvPr id="8" name="TextBox 7"/>
-          <p:cNvSpPr txBox="1"/>
-          <p:nvPr/>
-        </p:nvSpPr>
-        <p:spPr>
-          <a:xfrm>
-            <a:off x="4084320" y="3487826"/>
-            <a:ext cx="198120" cy="259080"/>
-          </a:xfrm>
-          <a:prstGeom prst="rect">
-            <a:avLst/>
-          </a:prstGeom>
-          <a:noFill/>
-        </p:spPr>
-        <p:txBody>
-          <a:bodyPr wrap="square" lIns="0" rIns="0" tIns="0" bIns="0" anchor="t">
-            <a:spAutoFit/>
-          </a:bodyPr>
-          <a:lstStyle/>
-          <a:p>
-            <a:pPr algn="ctr">
-              <a:lnSpc>
-                <a:spcPts val="1872"/>
-              </a:lnSpc>
-            </a:pPr>
-            <a:r>
-              <a:rPr sz="1560" b="0">
-                <a:solidFill>
-                  <a:srgbClr val="2C3A63"/>
-                </a:solidFill>
-                <a:latin typeface="Microsoft JhengHei"/>
-                <a:ea typeface="Microsoft JhengHei"/>
-                <a:cs typeface="Microsoft JhengHei"/>
-              </a:rPr>
-              <a:t>→</a:t>
-            </a:r>
-          </a:p>
-        </p:txBody>
-      </p:sp>
-      <p:sp>
-        <p:nvSpPr>
-          <p:cNvPr id="9" name="Rounded Rectangle 8"/>
-          <p:cNvSpPr/>
-          <p:nvPr/>
-        </p:nvSpPr>
-        <p:spPr>
-          <a:xfrm>
-            <a:off x="4373880" y="3076346"/>
-            <a:ext cx="3444240" cy="1127760"/>
-          </a:xfrm>
-          <a:prstGeom prst="roundRect">
-            <a:avLst>
-              <a:gd name="adj" fmla="val 8108"/>
-            </a:avLst>
-          </a:prstGeom>
-          <a:solidFill>
-            <a:srgbClr val="1B2542"/>
-          </a:solidFill>
-          <a:ln w="12700">
-            <a:solidFill>
-              <a:srgbClr val="7CB8FF"/>
-            </a:solidFill>
-          </a:ln>
-          <a:effectLst/>
-        </p:spPr>
-        <p:style>
-          <a:lnRef idx="1">
-            <a:schemeClr val="accent1"/>
-          </a:lnRef>
-          <a:fillRef idx="3">
-            <a:schemeClr val="accent1"/>
-          </a:fillRef>
-          <a:effectRef idx="2">
-            <a:schemeClr val="accent1"/>
-          </a:effectRef>
-          <a:fontRef idx="minor">
-            <a:schemeClr val="lt1"/>
-          </a:fontRef>
-        </p:style>
-        <p:txBody>
-          <a:bodyPr rtlCol="0" anchor="ctr"/>
-          <a:lstStyle/>
-          <a:p/>
-        </p:txBody>
-      </p:sp>
-      <p:sp>
-        <p:nvSpPr>
-          <p:cNvPr id="10" name="TextBox 9"/>
-          <p:cNvSpPr txBox="1"/>
-          <p:nvPr/>
-        </p:nvSpPr>
-        <p:spPr>
-          <a:xfrm>
-            <a:off x="4434840" y="3213506"/>
-            <a:ext cx="3322320" cy="152400"/>
-          </a:xfrm>
-          <a:prstGeom prst="rect">
-            <a:avLst/>
-          </a:prstGeom>
-          <a:noFill/>
-        </p:spPr>
-        <p:txBody>
-          <a:bodyPr wrap="square" lIns="0" rIns="0" tIns="0" bIns="0" anchor="t">
-            <a:spAutoFit/>
-          </a:bodyPr>
-          <a:lstStyle/>
-          <a:p>
-            <a:pPr algn="ctr">
-              <a:lnSpc>
-                <a:spcPts val="1176"/>
-              </a:lnSpc>
-            </a:pPr>
-            <a:r>
-              <a:rPr sz="840" b="0">
-                <a:solidFill>
-                  <a:srgbClr val="AEBFE0"/>
-                </a:solidFill>
-                <a:latin typeface="Microsoft JhengHei"/>
-                <a:ea typeface="Microsoft JhengHei"/>
-                <a:cs typeface="Microsoft JhengHei"/>
-              </a:rPr>
-              <a:t>第二遍</a:t>
-            </a:r>
-          </a:p>
-        </p:txBody>
-      </p:sp>
-      <p:sp>
-        <p:nvSpPr>
-          <p:cNvPr id="11" name="TextBox 10"/>
-          <p:cNvSpPr txBox="1"/>
-          <p:nvPr/>
-        </p:nvSpPr>
-        <p:spPr>
-          <a:xfrm>
-            <a:off x="4434840" y="3396386"/>
-            <a:ext cx="3322320" cy="243840"/>
-          </a:xfrm>
-          <a:prstGeom prst="rect">
-            <a:avLst/>
-          </a:prstGeom>
-          <a:noFill/>
-        </p:spPr>
-        <p:txBody>
-          <a:bodyPr wrap="square" lIns="0" rIns="0" tIns="0" bIns="0" anchor="t">
-            <a:spAutoFit/>
-          </a:bodyPr>
-          <a:lstStyle/>
-          <a:p>
-            <a:pPr algn="ctr">
-              <a:lnSpc>
-                <a:spcPts val="1764"/>
-              </a:lnSpc>
-            </a:pPr>
-            <a:r>
-              <a:rPr sz="1260" b="1">
-                <a:solidFill>
-                  <a:srgbClr val="F4F7FF"/>
-                </a:solidFill>
-                <a:latin typeface="Microsoft JhengHei"/>
-                <a:ea typeface="Microsoft JhengHei"/>
-                <a:cs typeface="Microsoft JhengHei"/>
-              </a:rPr>
-              <a:t>開著網站跟著做</a:t>
-            </a:r>
-          </a:p>
-        </p:txBody>
-      </p:sp>
-      <p:sp>
-        <p:nvSpPr>
-          <p:cNvPr id="12" name="TextBox 11"/>
-          <p:cNvSpPr txBox="1"/>
-          <p:nvPr/>
-        </p:nvSpPr>
-        <p:spPr>
-          <a:xfrm>
-            <a:off x="4434840" y="3685946"/>
-            <a:ext cx="3322320" cy="381000"/>
-          </a:xfrm>
-          <a:prstGeom prst="rect">
-            <a:avLst/>
-          </a:prstGeom>
-          <a:noFill/>
-        </p:spPr>
-        <p:txBody>
-          <a:bodyPr wrap="square" lIns="0" rIns="0" tIns="0" bIns="0" anchor="t">
-            <a:spAutoFit/>
-          </a:bodyPr>
-          <a:lstStyle/>
-          <a:p>
-            <a:pPr algn="ctr">
-              <a:lnSpc>
-                <a:spcPts val="1395"/>
-              </a:lnSpc>
-            </a:pPr>
-            <a:r>
-              <a:rPr sz="900" b="0">
-                <a:solidFill>
-                  <a:srgbClr val="AEBFE0"/>
-                </a:solidFill>
-                <a:latin typeface="Microsoft JhengHei"/>
-                <a:ea typeface="Microsoft JhengHei"/>
-                <a:cs typeface="Microsoft JhengHei"/>
-              </a:rPr>
-              <a:t>卡住就暫停，不用趕</a:t>
-            </a:r>
-          </a:p>
-        </p:txBody>
-      </p:sp>
-      <p:sp>
-        <p:nvSpPr>
-          <p:cNvPr id="13" name="TextBox 12"/>
-          <p:cNvSpPr txBox="1"/>
-          <p:nvPr/>
-        </p:nvSpPr>
-        <p:spPr>
-          <a:xfrm>
-            <a:off x="7909560" y="3487826"/>
-            <a:ext cx="198120" cy="259080"/>
-          </a:xfrm>
-          <a:prstGeom prst="rect">
-            <a:avLst/>
-          </a:prstGeom>
-          <a:noFill/>
-        </p:spPr>
-        <p:txBody>
-          <a:bodyPr wrap="square" lIns="0" rIns="0" tIns="0" bIns="0" anchor="t">
-            <a:spAutoFit/>
-          </a:bodyPr>
-          <a:lstStyle/>
-          <a:p>
-            <a:pPr algn="ctr">
-              <a:lnSpc>
-                <a:spcPts val="1872"/>
-              </a:lnSpc>
-            </a:pPr>
-            <a:r>
-              <a:rPr sz="1560" b="0">
-                <a:solidFill>
-                  <a:srgbClr val="2C3A63"/>
-                </a:solidFill>
-                <a:latin typeface="Microsoft JhengHei"/>
-                <a:ea typeface="Microsoft JhengHei"/>
-                <a:cs typeface="Microsoft JhengHei"/>
-              </a:rPr>
-              <a:t>→</a:t>
-            </a:r>
-          </a:p>
-        </p:txBody>
-      </p:sp>
-      <p:sp>
-        <p:nvSpPr>
-          <p:cNvPr id="14" name="Rounded Rectangle 13"/>
-          <p:cNvSpPr/>
-          <p:nvPr/>
-        </p:nvSpPr>
-        <p:spPr>
-          <a:xfrm>
-            <a:off x="8199120" y="3076346"/>
-            <a:ext cx="3444240" cy="1127760"/>
-          </a:xfrm>
-          <a:prstGeom prst="roundRect">
-            <a:avLst>
-              <a:gd name="adj" fmla="val 8108"/>
-            </a:avLst>
-          </a:prstGeom>
-          <a:solidFill>
-            <a:srgbClr val="1B2542"/>
-          </a:solidFill>
-          <a:ln w="12700">
-            <a:solidFill>
-              <a:srgbClr val="7CB8FF"/>
-            </a:solidFill>
-          </a:ln>
-          <a:effectLst/>
-        </p:spPr>
-        <p:style>
-          <a:lnRef idx="1">
-            <a:schemeClr val="accent1"/>
-          </a:lnRef>
-          <a:fillRef idx="3">
-            <a:schemeClr val="accent1"/>
-          </a:fillRef>
-          <a:effectRef idx="2">
-            <a:schemeClr val="accent1"/>
-          </a:effectRef>
-          <a:fontRef idx="minor">
-            <a:schemeClr val="lt1"/>
-          </a:fontRef>
-        </p:style>
-        <p:txBody>
-          <a:bodyPr rtlCol="0" anchor="ctr"/>
-          <a:lstStyle/>
-          <a:p/>
-        </p:txBody>
-      </p:sp>
-      <p:sp>
-        <p:nvSpPr>
-          <p:cNvPr id="15" name="TextBox 14"/>
-          <p:cNvSpPr txBox="1"/>
-          <p:nvPr/>
-        </p:nvSpPr>
-        <p:spPr>
-          <a:xfrm>
-            <a:off x="8260080" y="3213506"/>
-            <a:ext cx="3322320" cy="152400"/>
-          </a:xfrm>
-          <a:prstGeom prst="rect">
-            <a:avLst/>
-          </a:prstGeom>
-          <a:noFill/>
-        </p:spPr>
-        <p:txBody>
-          <a:bodyPr wrap="square" lIns="0" rIns="0" tIns="0" bIns="0" anchor="t">
-            <a:spAutoFit/>
-          </a:bodyPr>
-          <a:lstStyle/>
-          <a:p>
-            <a:pPr algn="ctr">
-              <a:lnSpc>
-                <a:spcPts val="1176"/>
-              </a:lnSpc>
-            </a:pPr>
-            <a:r>
-              <a:rPr sz="840" b="0">
-                <a:solidFill>
-                  <a:srgbClr val="AEBFE0"/>
-                </a:solidFill>
-                <a:latin typeface="Microsoft JhengHei"/>
-                <a:ea typeface="Microsoft JhengHei"/>
-                <a:cs typeface="Microsoft JhengHei"/>
-              </a:rPr>
-              <a:t>之後</a:t>
-            </a:r>
-          </a:p>
-        </p:txBody>
-      </p:sp>
-      <p:sp>
-        <p:nvSpPr>
-          <p:cNvPr id="16" name="TextBox 15"/>
-          <p:cNvSpPr txBox="1"/>
-          <p:nvPr/>
-        </p:nvSpPr>
-        <p:spPr>
-          <a:xfrm>
-            <a:off x="8260080" y="3396386"/>
-            <a:ext cx="3322320" cy="243840"/>
-          </a:xfrm>
-          <a:prstGeom prst="rect">
-            <a:avLst/>
-          </a:prstGeom>
-          <a:noFill/>
-        </p:spPr>
-        <p:txBody>
-          <a:bodyPr wrap="square" lIns="0" rIns="0" tIns="0" bIns="0" anchor="t">
-            <a:spAutoFit/>
-          </a:bodyPr>
-          <a:lstStyle/>
-          <a:p>
-            <a:pPr algn="ctr">
-              <a:lnSpc>
-                <a:spcPts val="1764"/>
-              </a:lnSpc>
-            </a:pPr>
-            <a:r>
-              <a:rPr sz="1260" b="1">
-                <a:solidFill>
-                  <a:srgbClr val="F4F7FF"/>
-                </a:solidFill>
-                <a:latin typeface="Microsoft JhengHei"/>
-                <a:ea typeface="Microsoft JhengHei"/>
-                <a:cs typeface="Microsoft JhengHei"/>
-              </a:rPr>
-              <a:t>只回放特定段落</a:t>
-            </a:r>
-          </a:p>
-        </p:txBody>
-      </p:sp>
-      <p:sp>
-        <p:nvSpPr>
-          <p:cNvPr id="17" name="TextBox 16"/>
-          <p:cNvSpPr txBox="1"/>
-          <p:nvPr/>
-        </p:nvSpPr>
-        <p:spPr>
-          <a:xfrm>
-            <a:off x="8260080" y="3685946"/>
-            <a:ext cx="3322320" cy="381000"/>
-          </a:xfrm>
-          <a:prstGeom prst="rect">
-            <a:avLst/>
-          </a:prstGeom>
-          <a:noFill/>
-        </p:spPr>
-        <p:txBody>
-          <a:bodyPr wrap="square" lIns="0" rIns="0" tIns="0" bIns="0" anchor="t">
-            <a:spAutoFit/>
-          </a:bodyPr>
-          <a:lstStyle/>
-          <a:p>
-            <a:pPr algn="ctr">
-              <a:lnSpc>
-                <a:spcPts val="1395"/>
-              </a:lnSpc>
-            </a:pPr>
-            <a:r>
-              <a:rPr sz="900" b="0">
-                <a:solidFill>
-                  <a:srgbClr val="AEBFE0"/>
-                </a:solidFill>
-                <a:latin typeface="Microsoft JhengHei"/>
-                <a:ea typeface="Microsoft JhengHei"/>
-                <a:cs typeface="Microsoft JhengHei"/>
-              </a:rPr>
-              <a:t>其他時候直接查網站</a:t>
-            </a:r>
-          </a:p>
-        </p:txBody>
-      </p:sp>
-      <p:sp>
-        <p:nvSpPr>
-          <p:cNvPr id="18" name="TextBox 17"/>
-          <p:cNvSpPr txBox="1"/>
-          <p:nvPr/>
-        </p:nvSpPr>
-        <p:spPr>
-          <a:xfrm>
-            <a:off x="548640" y="4402226"/>
-            <a:ext cx="11094720" cy="336803"/>
-          </a:xfrm>
-          <a:prstGeom prst="rect">
-            <a:avLst/>
-          </a:prstGeom>
-          <a:noFill/>
-        </p:spPr>
-        <p:txBody>
-          <a:bodyPr wrap="square" lIns="0" rIns="0" tIns="0" bIns="0" anchor="t">
-            <a:spAutoFit/>
-          </a:bodyPr>
-          <a:lstStyle/>
-          <a:p>
-            <a:pPr algn="l">
-              <a:lnSpc>
-                <a:spcPts val="2652"/>
-              </a:lnSpc>
-            </a:pPr>
-            <a:r>
-              <a:rPr sz="1560" b="0">
-                <a:solidFill>
-                  <a:srgbClr val="AEBFE0"/>
-                </a:solidFill>
-                <a:latin typeface="Microsoft JhengHei"/>
-                <a:ea typeface="Microsoft JhengHei"/>
-                <a:cs typeface="Microsoft JhengHei"/>
-              </a:rPr>
-              <a:t>沒有觀看期限。</a:t>
-            </a:r>
-          </a:p>
-        </p:txBody>
-      </p:sp>
-      <p:sp>
-        <p:nvSpPr>
-          <p:cNvPr id="19" name="Rectangle 18"/>
-          <p:cNvSpPr/>
-          <p:nvPr/>
-        </p:nvSpPr>
-        <p:spPr>
-          <a:xfrm>
-            <a:off x="0" y="6507480"/>
-            <a:ext cx="12192000" cy="350520"/>
-          </a:xfrm>
-          <a:prstGeom prst="rect">
-            <a:avLst/>
-          </a:prstGeom>
-          <a:solidFill>
-            <a:srgbClr val="060A16"/>
-          </a:solidFill>
-          <a:ln>
-            <a:noFill/>
-          </a:ln>
-          <a:effectLst/>
-        </p:spPr>
-        <p:style>
-          <a:lnRef idx="1">
-            <a:schemeClr val="accent1"/>
-          </a:lnRef>
-          <a:fillRef idx="3">
-            <a:schemeClr val="accent1"/>
-          </a:fillRef>
-          <a:effectRef idx="2">
-            <a:schemeClr val="accent1"/>
-          </a:effectRef>
-          <a:fontRef idx="minor">
-            <a:schemeClr val="lt1"/>
-          </a:fontRef>
-        </p:style>
-        <p:txBody>
-          <a:bodyPr rtlCol="0" anchor="ctr"/>
-          <a:lstStyle/>
-          <a:p/>
-        </p:txBody>
-      </p:sp>
-      <p:sp>
-        <p:nvSpPr>
-          <p:cNvPr id="20" name="TextBox 19"/>
-          <p:cNvSpPr txBox="1"/>
-          <p:nvPr/>
-        </p:nvSpPr>
-        <p:spPr>
-          <a:xfrm>
-            <a:off x="182880" y="6606540"/>
-            <a:ext cx="3048000" cy="167640"/>
-          </a:xfrm>
-          <a:prstGeom prst="rect">
-            <a:avLst/>
-          </a:prstGeom>
-          <a:noFill/>
-        </p:spPr>
-        <p:txBody>
-          <a:bodyPr wrap="square" lIns="0" rIns="0" tIns="0" bIns="0" anchor="t">
-            <a:spAutoFit/>
-          </a:bodyPr>
-          <a:lstStyle/>
-          <a:p>
-            <a:pPr algn="l">
-              <a:lnSpc>
-                <a:spcPts val="1008"/>
-              </a:lnSpc>
-            </a:pPr>
-            <a:r>
-              <a:rPr sz="840" b="0">
-                <a:solidFill>
-                  <a:srgbClr val="7CB8FF"/>
-                </a:solidFill>
-                <a:latin typeface="Microsoft JhengHei"/>
-                <a:ea typeface="Microsoft JhengHei"/>
-                <a:cs typeface="Microsoft JhengHei"/>
-              </a:rPr>
-              <a:t>看片方式</a:t>
-            </a:r>
-          </a:p>
-        </p:txBody>
-      </p:sp>
-      <p:sp>
-        <p:nvSpPr>
-          <p:cNvPr id="21" name="TextBox 20"/>
-          <p:cNvSpPr txBox="1"/>
-          <p:nvPr/>
-        </p:nvSpPr>
-        <p:spPr>
-          <a:xfrm>
-            <a:off x="8961120" y="6606540"/>
-            <a:ext cx="3048000" cy="167640"/>
-          </a:xfrm>
-          <a:prstGeom prst="rect">
-            <a:avLst/>
-          </a:prstGeom>
-          <a:noFill/>
-        </p:spPr>
-        <p:txBody>
-          <a:bodyPr wrap="square" lIns="0" rIns="0" tIns="0" bIns="0" anchor="t">
-            <a:spAutoFit/>
-          </a:bodyPr>
-          <a:lstStyle/>
-          <a:p>
-            <a:pPr algn="l">
-              <a:lnSpc>
-                <a:spcPts val="1008"/>
-              </a:lnSpc>
-            </a:pPr>
-            <a:r>
-              <a:rPr sz="840" b="0">
-                <a:solidFill>
-                  <a:srgbClr val="AEBFE0"/>
-                </a:solidFill>
-                <a:latin typeface="Microsoft JhengHei"/>
-                <a:ea typeface="Microsoft JhengHei"/>
-                <a:cs typeface="Microsoft JhengHei"/>
-              </a:rPr>
-              <a:t>8 / 10</a:t>
+              <a:t>8 / 12</a:t>
             </a:r>
           </a:p>
         </p:txBody>
@@ -9457,7 +11042,7 @@
         </p:nvSpPr>
         <p:spPr>
           <a:xfrm>
-            <a:off x="548640" y="1764258"/>
+            <a:off x="548640" y="1476222"/>
             <a:ext cx="11094720" cy="523036"/>
           </a:xfrm>
           <a:prstGeom prst="rect">
@@ -9485,7 +11070,7 @@
                 <a:ea typeface="Microsoft JhengHei"/>
                 <a:cs typeface="Microsoft JhengHei"/>
               </a:rPr>
-              <a:t>跟丟了怎麼辦？</a:t>
+              <a:t>除了單元頁面，還有</a:t>
             </a:r>
           </a:p>
         </p:txBody>
@@ -9498,7 +11083,7 @@
         </p:nvSpPr>
         <p:spPr>
           <a:xfrm>
-            <a:off x="548640" y="2409215"/>
+            <a:off x="548640" y="2121179"/>
             <a:ext cx="731520" cy="53340"/>
           </a:xfrm>
           <a:prstGeom prst="roundRect">
@@ -9536,311 +11121,240 @@
       </p:sp>
       <p:sp>
         <p:nvSpPr>
-          <p:cNvPr id="4" name="Rounded Rectangle 3"/>
-          <p:cNvSpPr/>
-          <p:nvPr/>
-        </p:nvSpPr>
-        <p:spPr>
-          <a:xfrm>
-            <a:off x="548640" y="2813075"/>
-            <a:ext cx="11094720" cy="615696"/>
-          </a:xfrm>
-          <a:prstGeom prst="roundRect">
-            <a:avLst>
-              <a:gd name="adj" fmla="val 14851"/>
-            </a:avLst>
-          </a:prstGeom>
-          <a:solidFill>
-            <a:srgbClr val="131B33"/>
-          </a:solidFill>
-          <a:ln>
-            <a:noFill/>
-          </a:ln>
-          <a:effectLst/>
-        </p:spPr>
-        <p:style>
-          <a:lnRef idx="1">
-            <a:schemeClr val="accent1"/>
-          </a:lnRef>
-          <a:fillRef idx="3">
-            <a:schemeClr val="accent1"/>
-          </a:fillRef>
-          <a:effectRef idx="2">
-            <a:schemeClr val="accent1"/>
-          </a:effectRef>
-          <a:fontRef idx="minor">
-            <a:schemeClr val="lt1"/>
-          </a:fontRef>
-        </p:style>
-        <p:txBody>
-          <a:bodyPr rtlCol="0" anchor="ctr"/>
-          <a:lstStyle/>
-          <a:p/>
-        </p:txBody>
-      </p:sp>
-      <p:sp>
-        <p:nvSpPr>
-          <p:cNvPr id="5" name="Rectangle 4"/>
-          <p:cNvSpPr/>
-          <p:nvPr/>
-        </p:nvSpPr>
-        <p:spPr>
-          <a:xfrm>
-            <a:off x="548640" y="2813075"/>
-            <a:ext cx="45720" cy="615696"/>
+          <p:cNvPr id="4" name="TextBox 3"/>
+          <p:cNvSpPr txBox="1"/>
+          <p:nvPr/>
+        </p:nvSpPr>
+        <p:spPr>
+          <a:xfrm>
+            <a:off x="548640" y="2387879"/>
+            <a:ext cx="11094720" cy="298703"/>
           </a:xfrm>
           <a:prstGeom prst="rect">
             <a:avLst/>
           </a:prstGeom>
-          <a:solidFill>
-            <a:srgbClr val="FF8A80"/>
-          </a:solidFill>
-          <a:ln>
-            <a:noFill/>
-          </a:ln>
-          <a:effectLst/>
-        </p:spPr>
-        <p:style>
-          <a:lnRef idx="1">
-            <a:schemeClr val="accent1"/>
-          </a:lnRef>
-          <a:fillRef idx="3">
-            <a:schemeClr val="accent1"/>
-          </a:fillRef>
-          <a:effectRef idx="2">
-            <a:schemeClr val="accent1"/>
-          </a:effectRef>
-          <a:fontRef idx="minor">
-            <a:schemeClr val="lt1"/>
-          </a:fontRef>
-        </p:style>
-        <p:txBody>
-          <a:bodyPr rtlCol="0" anchor="ctr"/>
-          <a:lstStyle/>
-          <a:p/>
-        </p:txBody>
-      </p:sp>
-      <p:sp>
-        <p:nvSpPr>
-          <p:cNvPr id="6" name="TextBox 5"/>
-          <p:cNvSpPr txBox="1"/>
-          <p:nvPr/>
-        </p:nvSpPr>
-        <p:spPr>
-          <a:xfrm>
-            <a:off x="777240" y="2965475"/>
-            <a:ext cx="10683240" cy="310896"/>
-          </a:xfrm>
-          <a:prstGeom prst="rect">
-            <a:avLst/>
-          </a:prstGeom>
           <a:noFill/>
         </p:spPr>
         <p:txBody>
-          <a:bodyPr wrap="square" lIns="0" rIns="0" tIns="0" bIns="0" anchor="ctr">
+          <a:bodyPr wrap="square" lIns="0" rIns="0" tIns="0" bIns="0" anchor="t">
             <a:spAutoFit/>
           </a:bodyPr>
           <a:lstStyle/>
           <a:p>
             <a:pPr algn="l">
               <a:lnSpc>
-                <a:spcPts val="2448"/>
+                <a:spcPts val="2352"/>
               </a:lnSpc>
             </a:pPr>
             <a:r>
-              <a:rPr sz="1440" b="1">
+              <a:rPr sz="1680" b="1">
                 <a:solidFill>
-                  <a:srgbClr val="FFB4AE"/>
+                  <a:srgbClr val="7CB8FF"/>
                 </a:solidFill>
                 <a:latin typeface="Microsoft JhengHei"/>
                 <a:ea typeface="Microsoft JhengHei"/>
                 <a:cs typeface="Microsoft JhengHei"/>
               </a:rPr>
-              <a:t>不要</a:t>
-            </a:r>
-            <a:r>
-              <a:rPr sz="1440" b="0">
+              <a:t>七份下載教材</a:t>
+            </a:r>
+          </a:p>
+        </p:txBody>
+      </p:sp>
+      <p:sp>
+        <p:nvSpPr>
+          <p:cNvPr id="5" name="TextBox 4"/>
+          <p:cNvSpPr txBox="1"/>
+          <p:nvPr/>
+        </p:nvSpPr>
+        <p:spPr>
+          <a:xfrm>
+            <a:off x="548640" y="2793263"/>
+            <a:ext cx="11094720" cy="544068"/>
+          </a:xfrm>
+          <a:prstGeom prst="rect">
+            <a:avLst/>
+          </a:prstGeom>
+          <a:noFill/>
+        </p:spPr>
+        <p:txBody>
+          <a:bodyPr wrap="square" lIns="0" rIns="0" tIns="0" bIns="0" anchor="t">
+            <a:spAutoFit/>
+          </a:bodyPr>
+          <a:lstStyle/>
+          <a:p>
+            <a:pPr algn="l">
+              <a:lnSpc>
+                <a:spcPts val="2142"/>
+              </a:lnSpc>
+            </a:pPr>
+            <a:r>
+              <a:rPr sz="1260" b="0">
                 <a:solidFill>
-                  <a:srgbClr val="FFB4AE"/>
+                  <a:srgbClr val="F4F7FF"/>
                 </a:solidFill>
                 <a:latin typeface="Microsoft JhengHei"/>
                 <a:ea typeface="Microsoft JhengHei"/>
                 <a:cs typeface="Microsoft JhengHei"/>
               </a:rPr>
-              <a:t>  </a:t>
-            </a:r>
-            <a:r>
-              <a:rPr sz="1440" b="0">
+              <a:t>開發環境安裝指引 · REST API 命名規範 · Docker PostgreSQL 與 pgvector 設定 · pgvector 向量檢索指令 · JWT 架構與認證流程 · React 與 Axios 前後端整合 · Spring AI 與 Tool Calling 架構</a:t>
+            </a:r>
+          </a:p>
+        </p:txBody>
+      </p:sp>
+      <p:sp>
+        <p:nvSpPr>
+          <p:cNvPr id="6" name="TextBox 5"/>
+          <p:cNvSpPr txBox="1"/>
+          <p:nvPr/>
+        </p:nvSpPr>
+        <p:spPr>
+          <a:xfrm>
+            <a:off x="548640" y="3444011"/>
+            <a:ext cx="11094720" cy="298703"/>
+          </a:xfrm>
+          <a:prstGeom prst="rect">
+            <a:avLst/>
+          </a:prstGeom>
+          <a:noFill/>
+        </p:spPr>
+        <p:txBody>
+          <a:bodyPr wrap="square" lIns="0" rIns="0" tIns="0" bIns="0" anchor="t">
+            <a:spAutoFit/>
+          </a:bodyPr>
+          <a:lstStyle/>
+          <a:p>
+            <a:pPr algn="l">
+              <a:lnSpc>
+                <a:spcPts val="2352"/>
+              </a:lnSpc>
+            </a:pPr>
+            <a:r>
+              <a:rPr sz="1680" b="1">
                 <a:solidFill>
-                  <a:srgbClr val="FFB4AE"/>
+                  <a:srgbClr val="7CB8FF"/>
                 </a:solidFill>
                 <a:latin typeface="Microsoft JhengHei"/>
                 <a:ea typeface="Microsoft JhengHei"/>
                 <a:cs typeface="Microsoft JhengHei"/>
               </a:rPr>
-              <a:t>慌著暫停、倒帶、追進度——越追越亂</a:t>
-            </a:r>
-          </a:p>
-        </p:txBody>
-      </p:sp>
-      <p:sp>
-        <p:nvSpPr>
-          <p:cNvPr id="7" name="Rounded Rectangle 6"/>
-          <p:cNvSpPr/>
-          <p:nvPr/>
-        </p:nvSpPr>
-        <p:spPr>
-          <a:xfrm>
-            <a:off x="548640" y="3565931"/>
-            <a:ext cx="11094720" cy="615696"/>
-          </a:xfrm>
-          <a:prstGeom prst="roundRect">
-            <a:avLst>
-              <a:gd name="adj" fmla="val 14851"/>
-            </a:avLst>
-          </a:prstGeom>
-          <a:solidFill>
-            <a:srgbClr val="131B33"/>
-          </a:solidFill>
-          <a:ln>
-            <a:noFill/>
-          </a:ln>
-          <a:effectLst/>
-        </p:spPr>
-        <p:style>
-          <a:lnRef idx="1">
-            <a:schemeClr val="accent1"/>
-          </a:lnRef>
-          <a:fillRef idx="3">
-            <a:schemeClr val="accent1"/>
-          </a:fillRef>
-          <a:effectRef idx="2">
-            <a:schemeClr val="accent1"/>
-          </a:effectRef>
-          <a:fontRef idx="minor">
-            <a:schemeClr val="lt1"/>
-          </a:fontRef>
-        </p:style>
-        <p:txBody>
-          <a:bodyPr rtlCol="0" anchor="ctr"/>
-          <a:lstStyle/>
-          <a:p/>
-        </p:txBody>
-      </p:sp>
-      <p:sp>
-        <p:nvSpPr>
-          <p:cNvPr id="8" name="Rectangle 7"/>
-          <p:cNvSpPr/>
-          <p:nvPr/>
-        </p:nvSpPr>
-        <p:spPr>
-          <a:xfrm>
-            <a:off x="548640" y="3565931"/>
-            <a:ext cx="45720" cy="615696"/>
+              <a:t>還有</a:t>
+            </a:r>
+          </a:p>
+        </p:txBody>
+      </p:sp>
+      <p:sp>
+        <p:nvSpPr>
+          <p:cNvPr id="7" name="TextBox 6"/>
+          <p:cNvSpPr txBox="1"/>
+          <p:nvPr/>
+        </p:nvSpPr>
+        <p:spPr>
+          <a:xfrm>
+            <a:off x="548640" y="3849395"/>
+            <a:ext cx="11094720" cy="272034"/>
           </a:xfrm>
           <a:prstGeom prst="rect">
             <a:avLst/>
           </a:prstGeom>
-          <a:solidFill>
-            <a:srgbClr val="57F097"/>
-          </a:solidFill>
-          <a:ln>
-            <a:noFill/>
-          </a:ln>
-          <a:effectLst/>
-        </p:spPr>
-        <p:style>
-          <a:lnRef idx="1">
-            <a:schemeClr val="accent1"/>
-          </a:lnRef>
-          <a:fillRef idx="3">
-            <a:schemeClr val="accent1"/>
-          </a:fillRef>
-          <a:effectRef idx="2">
-            <a:schemeClr val="accent1"/>
-          </a:effectRef>
-          <a:fontRef idx="minor">
-            <a:schemeClr val="lt1"/>
-          </a:fontRef>
-        </p:style>
-        <p:txBody>
-          <a:bodyPr rtlCol="0" anchor="ctr"/>
-          <a:lstStyle/>
-          <a:p/>
-        </p:txBody>
-      </p:sp>
-      <p:sp>
-        <p:nvSpPr>
-          <p:cNvPr id="9" name="TextBox 8"/>
-          <p:cNvSpPr txBox="1"/>
-          <p:nvPr/>
-        </p:nvSpPr>
-        <p:spPr>
-          <a:xfrm>
-            <a:off x="777240" y="3718331"/>
-            <a:ext cx="10683240" cy="310896"/>
-          </a:xfrm>
-          <a:prstGeom prst="rect">
-            <a:avLst/>
-          </a:prstGeom>
           <a:noFill/>
         </p:spPr>
         <p:txBody>
-          <a:bodyPr wrap="square" lIns="0" rIns="0" tIns="0" bIns="0" anchor="ctr">
+          <a:bodyPr wrap="square" lIns="0" rIns="0" tIns="0" bIns="0" anchor="t">
             <a:spAutoFit/>
           </a:bodyPr>
           <a:lstStyle/>
           <a:p>
             <a:pPr algn="l">
               <a:lnSpc>
-                <a:spcPts val="2448"/>
+                <a:spcPts val="2142"/>
               </a:lnSpc>
             </a:pPr>
             <a:r>
-              <a:rPr sz="1440" b="1">
+              <a:rPr sz="1260" b="1">
                 <a:solidFill>
-                  <a:srgbClr val="BBF7D0"/>
+                  <a:srgbClr val="F4F7FF"/>
                 </a:solidFill>
                 <a:latin typeface="Microsoft JhengHei"/>
                 <a:ea typeface="Microsoft JhengHei"/>
                 <a:cs typeface="Microsoft JhengHei"/>
               </a:rPr>
-              <a:t>要</a:t>
-            </a:r>
-            <a:r>
-              <a:rPr sz="1440" b="1">
+              <a:t>隨堂測驗</a:t>
+            </a:r>
+            <a:r>
+              <a:rPr sz="1260" b="0">
                 <a:solidFill>
-                  <a:srgbClr val="BBF7D0"/>
+                  <a:srgbClr val="F4F7FF"/>
                 </a:solidFill>
                 <a:latin typeface="Microsoft JhengHei"/>
                 <a:ea typeface="Microsoft JhengHei"/>
                 <a:cs typeface="Microsoft JhengHei"/>
               </a:rPr>
-              <a:t>  </a:t>
-            </a:r>
-            <a:r>
-              <a:rPr sz="1440" b="1">
+              <a:t>——檢查自己是否真的理解</a:t>
+            </a:r>
+          </a:p>
+        </p:txBody>
+      </p:sp>
+      <p:sp>
+        <p:nvSpPr>
+          <p:cNvPr id="8" name="TextBox 7"/>
+          <p:cNvSpPr txBox="1"/>
+          <p:nvPr/>
+        </p:nvSpPr>
+        <p:spPr>
+          <a:xfrm>
+            <a:off x="548640" y="4228109"/>
+            <a:ext cx="11094720" cy="272034"/>
+          </a:xfrm>
+          <a:prstGeom prst="rect">
+            <a:avLst/>
+          </a:prstGeom>
+          <a:noFill/>
+        </p:spPr>
+        <p:txBody>
+          <a:bodyPr wrap="square" lIns="0" rIns="0" tIns="0" bIns="0" anchor="t">
+            <a:spAutoFit/>
+          </a:bodyPr>
+          <a:lstStyle/>
+          <a:p>
+            <a:pPr algn="l">
+              <a:lnSpc>
+                <a:spcPts val="2142"/>
+              </a:lnSpc>
+            </a:pPr>
+            <a:r>
+              <a:rPr sz="1260" b="1">
                 <a:solidFill>
-                  <a:srgbClr val="BBF7D0"/>
+                  <a:srgbClr val="F4F7FF"/>
                 </a:solidFill>
                 <a:latin typeface="Microsoft JhengHei"/>
                 <a:ea typeface="Microsoft JhengHei"/>
                 <a:cs typeface="Microsoft JhengHei"/>
               </a:rPr>
-              <a:t>先把這一節看完，理解我在幹嘛，之後再回來慢慢做</a:t>
-            </a:r>
-          </a:p>
-        </p:txBody>
-      </p:sp>
-      <p:sp>
-        <p:nvSpPr>
-          <p:cNvPr id="10" name="Rounded Rectangle 9"/>
+              <a:t>附錄</a:t>
+            </a:r>
+            <a:r>
+              <a:rPr sz="1260" b="0">
+                <a:solidFill>
+                  <a:srgbClr val="F4F7FF"/>
+                </a:solidFill>
+                <a:latin typeface="Microsoft JhengHei"/>
+                <a:ea typeface="Microsoft JhengHei"/>
+                <a:cs typeface="Microsoft JhengHei"/>
+              </a:rPr>
+              <a:t>——術語表、常見問題、驗收檢核清單</a:t>
+            </a:r>
+          </a:p>
+        </p:txBody>
+      </p:sp>
+      <p:sp>
+        <p:nvSpPr>
+          <p:cNvPr id="9" name="Rounded Rectangle 8"/>
           <p:cNvSpPr/>
           <p:nvPr/>
         </p:nvSpPr>
         <p:spPr>
           <a:xfrm>
-            <a:off x="548640" y="4501667"/>
+            <a:off x="548640" y="4789703"/>
             <a:ext cx="11094720" cy="439674"/>
           </a:xfrm>
           <a:prstGeom prst="roundRect">
@@ -9880,13 +11394,13 @@
       </p:sp>
       <p:sp>
         <p:nvSpPr>
-          <p:cNvPr id="11" name="Rectangle 10"/>
+          <p:cNvPr id="10" name="Rectangle 9"/>
           <p:cNvSpPr/>
           <p:nvPr/>
         </p:nvSpPr>
         <p:spPr>
           <a:xfrm>
-            <a:off x="548640" y="4501667"/>
+            <a:off x="548640" y="4789703"/>
             <a:ext cx="38100" cy="439674"/>
           </a:xfrm>
           <a:prstGeom prst="rect">
@@ -9922,13 +11436,13 @@
       </p:sp>
       <p:sp>
         <p:nvSpPr>
-          <p:cNvPr id="12" name="TextBox 11"/>
+          <p:cNvPr id="11" name="TextBox 10"/>
           <p:cNvSpPr txBox="1"/>
           <p:nvPr/>
         </p:nvSpPr>
         <p:spPr>
           <a:xfrm>
-            <a:off x="739140" y="4608347"/>
+            <a:off x="739140" y="4896383"/>
             <a:ext cx="10713720" cy="226314"/>
           </a:xfrm>
           <a:prstGeom prst="rect">
@@ -9956,7 +11470,7 @@
                 <a:ea typeface="Microsoft JhengHei"/>
                 <a:cs typeface="Microsoft JhengHei"/>
               </a:rPr>
-              <a:t>我示範的節奏</a:t>
+              <a:t>教學網站：</a:t>
             </a:r>
             <a:r>
               <a:rPr sz="1080" b="1">
@@ -9967,25 +11481,14 @@
                 <a:ea typeface="Microsoft JhengHei"/>
                 <a:cs typeface="Microsoft JhengHei"/>
               </a:rPr>
-              <a:t>一定</a:t>
-            </a:r>
-            <a:r>
-              <a:rPr sz="1080" b="0">
-                <a:solidFill>
-                  <a:srgbClr val="AEBFE0"/>
-                </a:solidFill>
-                <a:latin typeface="Microsoft JhengHei"/>
-                <a:ea typeface="Microsoft JhengHei"/>
-                <a:cs typeface="Microsoft JhengHei"/>
-              </a:rPr>
-              <a:t>比你自己動手快，這是正常的。你有無限次的機會。</a:t>
-            </a:r>
-          </a:p>
-        </p:txBody>
-      </p:sp>
-      <p:sp>
-        <p:nvSpPr>
-          <p:cNvPr id="13" name="Rectangle 12"/>
+              <a:t>https://kevintsai1202.github.io/ai-full-stack/</a:t>
+            </a:r>
+          </a:p>
+        </p:txBody>
+      </p:sp>
+      <p:sp>
+        <p:nvSpPr>
+          <p:cNvPr id="12" name="Rectangle 11"/>
           <p:cNvSpPr/>
           <p:nvPr/>
         </p:nvSpPr>
@@ -10027,7 +11530,7 @@
       </p:sp>
       <p:sp>
         <p:nvSpPr>
-          <p:cNvPr id="14" name="TextBox 13"/>
+          <p:cNvPr id="13" name="TextBox 12"/>
           <p:cNvSpPr txBox="1"/>
           <p:nvPr/>
         </p:nvSpPr>
@@ -10061,14 +11564,14 @@
                 <a:ea typeface="Microsoft JhengHei"/>
                 <a:cs typeface="Microsoft JhengHei"/>
               </a:rPr>
-              <a:t>看片方式</a:t>
-            </a:r>
-          </a:p>
-        </p:txBody>
-      </p:sp>
-      <p:sp>
-        <p:nvSpPr>
-          <p:cNvPr id="15" name="TextBox 14"/>
+              <a:t>網站</a:t>
+            </a:r>
+          </a:p>
+        </p:txBody>
+      </p:sp>
+      <p:sp>
+        <p:nvSpPr>
+          <p:cNvPr id="14" name="TextBox 13"/>
           <p:cNvSpPr txBox="1"/>
           <p:nvPr/>
         </p:nvSpPr>
@@ -10102,7 +11605,7 @@
                 <a:ea typeface="Microsoft JhengHei"/>
                 <a:cs typeface="Microsoft JhengHei"/>
               </a:rPr>
-              <a:t>9 / 10</a:t>
+              <a:t>9 / 12</a:t>
             </a:r>
           </a:p>
         </p:txBody>
